--- a/notes/figures/linear_attention.pptx
+++ b/notes/figures/linear_attention.pptx
@@ -270,7 +270,7 @@
           <a:p>
             <a:fld id="{80E0B833-63BB-8A4C-A45A-03FEC04F1FD2}" type="datetimeFigureOut">
               <a:rPr kumimoji="1" lang="zh-CN" altLang="en-US" smtClean="0"/>
-              <a:t>2024/6/20</a:t>
+              <a:t>2024/7/8</a:t>
             </a:fld>
             <a:endParaRPr kumimoji="1" lang="zh-CN" altLang="en-US"/>
           </a:p>
@@ -468,7 +468,7 @@
           <a:p>
             <a:fld id="{80E0B833-63BB-8A4C-A45A-03FEC04F1FD2}" type="datetimeFigureOut">
               <a:rPr kumimoji="1" lang="zh-CN" altLang="en-US" smtClean="0"/>
-              <a:t>2024/6/20</a:t>
+              <a:t>2024/7/8</a:t>
             </a:fld>
             <a:endParaRPr kumimoji="1" lang="zh-CN" altLang="en-US"/>
           </a:p>
@@ -676,7 +676,7 @@
           <a:p>
             <a:fld id="{80E0B833-63BB-8A4C-A45A-03FEC04F1FD2}" type="datetimeFigureOut">
               <a:rPr kumimoji="1" lang="zh-CN" altLang="en-US" smtClean="0"/>
-              <a:t>2024/6/20</a:t>
+              <a:t>2024/7/8</a:t>
             </a:fld>
             <a:endParaRPr kumimoji="1" lang="zh-CN" altLang="en-US"/>
           </a:p>
@@ -874,7 +874,7 @@
           <a:p>
             <a:fld id="{80E0B833-63BB-8A4C-A45A-03FEC04F1FD2}" type="datetimeFigureOut">
               <a:rPr kumimoji="1" lang="zh-CN" altLang="en-US" smtClean="0"/>
-              <a:t>2024/6/20</a:t>
+              <a:t>2024/7/8</a:t>
             </a:fld>
             <a:endParaRPr kumimoji="1" lang="zh-CN" altLang="en-US"/>
           </a:p>
@@ -1149,7 +1149,7 @@
           <a:p>
             <a:fld id="{80E0B833-63BB-8A4C-A45A-03FEC04F1FD2}" type="datetimeFigureOut">
               <a:rPr kumimoji="1" lang="zh-CN" altLang="en-US" smtClean="0"/>
-              <a:t>2024/6/20</a:t>
+              <a:t>2024/7/8</a:t>
             </a:fld>
             <a:endParaRPr kumimoji="1" lang="zh-CN" altLang="en-US"/>
           </a:p>
@@ -1414,7 +1414,7 @@
           <a:p>
             <a:fld id="{80E0B833-63BB-8A4C-A45A-03FEC04F1FD2}" type="datetimeFigureOut">
               <a:rPr kumimoji="1" lang="zh-CN" altLang="en-US" smtClean="0"/>
-              <a:t>2024/6/20</a:t>
+              <a:t>2024/7/8</a:t>
             </a:fld>
             <a:endParaRPr kumimoji="1" lang="zh-CN" altLang="en-US"/>
           </a:p>
@@ -1826,7 +1826,7 @@
           <a:p>
             <a:fld id="{80E0B833-63BB-8A4C-A45A-03FEC04F1FD2}" type="datetimeFigureOut">
               <a:rPr kumimoji="1" lang="zh-CN" altLang="en-US" smtClean="0"/>
-              <a:t>2024/6/20</a:t>
+              <a:t>2024/7/8</a:t>
             </a:fld>
             <a:endParaRPr kumimoji="1" lang="zh-CN" altLang="en-US"/>
           </a:p>
@@ -1967,7 +1967,7 @@
           <a:p>
             <a:fld id="{80E0B833-63BB-8A4C-A45A-03FEC04F1FD2}" type="datetimeFigureOut">
               <a:rPr kumimoji="1" lang="zh-CN" altLang="en-US" smtClean="0"/>
-              <a:t>2024/6/20</a:t>
+              <a:t>2024/7/8</a:t>
             </a:fld>
             <a:endParaRPr kumimoji="1" lang="zh-CN" altLang="en-US"/>
           </a:p>
@@ -2080,7 +2080,7 @@
           <a:p>
             <a:fld id="{80E0B833-63BB-8A4C-A45A-03FEC04F1FD2}" type="datetimeFigureOut">
               <a:rPr kumimoji="1" lang="zh-CN" altLang="en-US" smtClean="0"/>
-              <a:t>2024/6/20</a:t>
+              <a:t>2024/7/8</a:t>
             </a:fld>
             <a:endParaRPr kumimoji="1" lang="zh-CN" altLang="en-US"/>
           </a:p>
@@ -2391,7 +2391,7 @@
           <a:p>
             <a:fld id="{80E0B833-63BB-8A4C-A45A-03FEC04F1FD2}" type="datetimeFigureOut">
               <a:rPr kumimoji="1" lang="zh-CN" altLang="en-US" smtClean="0"/>
-              <a:t>2024/6/20</a:t>
+              <a:t>2024/7/8</a:t>
             </a:fld>
             <a:endParaRPr kumimoji="1" lang="zh-CN" altLang="en-US"/>
           </a:p>
@@ -2679,7 +2679,7 @@
           <a:p>
             <a:fld id="{80E0B833-63BB-8A4C-A45A-03FEC04F1FD2}" type="datetimeFigureOut">
               <a:rPr kumimoji="1" lang="zh-CN" altLang="en-US" smtClean="0"/>
-              <a:t>2024/6/20</a:t>
+              <a:t>2024/7/8</a:t>
             </a:fld>
             <a:endParaRPr kumimoji="1" lang="zh-CN" altLang="en-US"/>
           </a:p>
@@ -2920,7 +2920,7 @@
           <a:p>
             <a:fld id="{80E0B833-63BB-8A4C-A45A-03FEC04F1FD2}" type="datetimeFigureOut">
               <a:rPr kumimoji="1" lang="zh-CN" altLang="en-US" smtClean="0"/>
-              <a:t>2024/6/20</a:t>
+              <a:t>2024/7/8</a:t>
             </a:fld>
             <a:endParaRPr kumimoji="1" lang="zh-CN" altLang="en-US"/>
           </a:p>
@@ -3337,8 +3337,8 @@
           <a:chExt cx="0" cy="0"/>
         </a:xfrm>
       </p:grpSpPr>
-      <mc:AlternateContent xmlns:mc="http://schemas.openxmlformats.org/markup-compatibility/2006">
-        <mc:Choice xmlns:a14="http://schemas.microsoft.com/office/drawing/2010/main" Requires="a14">
+      <mc:AlternateContent xmlns:mc="http://schemas.openxmlformats.org/markup-compatibility/2006" xmlns:a14="http://schemas.microsoft.com/office/drawing/2010/main">
+        <mc:Choice Requires="a14">
           <p:sp>
             <p:nvSpPr>
               <p:cNvPr id="5" name="矩形 4">
@@ -3412,7 +3412,7 @@
             </p:txBody>
           </p:sp>
         </mc:Choice>
-        <mc:Fallback>
+        <mc:Fallback xmlns="">
           <p:sp>
             <p:nvSpPr>
               <p:cNvPr id="5" name="矩形 4">
@@ -3457,8 +3457,8 @@
           </p:sp>
         </mc:Fallback>
       </mc:AlternateContent>
-      <mc:AlternateContent xmlns:mc="http://schemas.openxmlformats.org/markup-compatibility/2006">
-        <mc:Choice xmlns:a14="http://schemas.microsoft.com/office/drawing/2010/main" Requires="a14">
+      <mc:AlternateContent xmlns:mc="http://schemas.openxmlformats.org/markup-compatibility/2006" xmlns:a14="http://schemas.microsoft.com/office/drawing/2010/main">
+        <mc:Choice Requires="a14">
           <p:sp>
             <p:nvSpPr>
               <p:cNvPr id="6" name="矩形 5">
@@ -3532,7 +3532,7 @@
             </p:txBody>
           </p:sp>
         </mc:Choice>
-        <mc:Fallback>
+        <mc:Fallback xmlns="">
           <p:sp>
             <p:nvSpPr>
               <p:cNvPr id="6" name="矩形 5">
@@ -3577,8 +3577,8 @@
           </p:sp>
         </mc:Fallback>
       </mc:AlternateContent>
-      <mc:AlternateContent xmlns:mc="http://schemas.openxmlformats.org/markup-compatibility/2006">
-        <mc:Choice xmlns:a14="http://schemas.microsoft.com/office/drawing/2010/main" Requires="a14">
+      <mc:AlternateContent xmlns:mc="http://schemas.openxmlformats.org/markup-compatibility/2006" xmlns:a14="http://schemas.microsoft.com/office/drawing/2010/main">
+        <mc:Choice Requires="a14">
           <p:sp>
             <p:nvSpPr>
               <p:cNvPr id="7" name="矩形 6">
@@ -3652,7 +3652,7 @@
             </p:txBody>
           </p:sp>
         </mc:Choice>
-        <mc:Fallback>
+        <mc:Fallback xmlns="">
           <p:sp>
             <p:nvSpPr>
               <p:cNvPr id="7" name="矩形 6">
@@ -3697,8 +3697,8 @@
           </p:sp>
         </mc:Fallback>
       </mc:AlternateContent>
-      <mc:AlternateContent xmlns:mc="http://schemas.openxmlformats.org/markup-compatibility/2006">
-        <mc:Choice xmlns:a14="http://schemas.microsoft.com/office/drawing/2010/main" Requires="a14">
+      <mc:AlternateContent xmlns:mc="http://schemas.openxmlformats.org/markup-compatibility/2006" xmlns:a14="http://schemas.microsoft.com/office/drawing/2010/main">
+        <mc:Choice Requires="a14">
           <p:sp>
             <p:nvSpPr>
               <p:cNvPr id="8" name="矩形 7">
@@ -3772,7 +3772,7 @@
             </p:txBody>
           </p:sp>
         </mc:Choice>
-        <mc:Fallback>
+        <mc:Fallback xmlns="">
           <p:sp>
             <p:nvSpPr>
               <p:cNvPr id="8" name="矩形 7">
@@ -3933,8 +3933,8 @@
           </a:p>
         </p:txBody>
       </p:sp>
-      <mc:AlternateContent xmlns:mc="http://schemas.openxmlformats.org/markup-compatibility/2006">
-        <mc:Choice xmlns:a14="http://schemas.microsoft.com/office/drawing/2010/main" Requires="a14">
+      <mc:AlternateContent xmlns:mc="http://schemas.openxmlformats.org/markup-compatibility/2006" xmlns:a14="http://schemas.microsoft.com/office/drawing/2010/main">
+        <mc:Choice Requires="a14">
           <p:sp>
             <p:nvSpPr>
               <p:cNvPr id="18" name="文本框 17">
@@ -3963,6 +3963,846 @@
               </a:bodyPr>
               <a:lstStyle/>
               <a:p>
+                <a:pPr/>
+                <a14:m>
+                  <m:oMathPara xmlns:m="http://schemas.openxmlformats.org/officeDocument/2006/math">
+                    <m:oMathParaPr>
+                      <m:jc m:val="centerGroup"/>
+                    </m:oMathParaPr>
+                    <m:oMath xmlns:m="http://schemas.openxmlformats.org/officeDocument/2006/math">
+                      <m:sSub>
+                        <m:sSubPr>
+                          <m:ctrlPr>
+                            <a:rPr kumimoji="1" lang="en-US" altLang="zh-CN" b="0" i="1" dirty="0" smtClean="0">
+                              <a:latin typeface="Cambria Math" panose="02040503050406030204" pitchFamily="18" charset="0"/>
+                            </a:rPr>
+                          </m:ctrlPr>
+                        </m:sSubPr>
+                        <m:e>
+                          <m:r>
+                            <a:rPr kumimoji="1" lang="en-US" altLang="zh-CN" b="0" i="1" dirty="0" smtClean="0">
+                              <a:latin typeface="Cambria Math" panose="02040503050406030204" pitchFamily="18" charset="0"/>
+                            </a:rPr>
+                            <m:t>𝑘</m:t>
+                          </m:r>
+                        </m:e>
+                        <m:sub>
+                          <m:r>
+                            <a:rPr kumimoji="1" lang="en-US" altLang="zh-CN" b="0" i="1" dirty="0" smtClean="0">
+                              <a:latin typeface="Cambria Math" panose="02040503050406030204" pitchFamily="18" charset="0"/>
+                            </a:rPr>
+                            <m:t>𝑖</m:t>
+                          </m:r>
+                        </m:sub>
+                      </m:sSub>
+                      <m:r>
+                        <a:rPr kumimoji="1" lang="zh-CN" altLang="en-US" i="1" dirty="0" smtClean="0">
+                          <a:latin typeface="Cambria Math" panose="02040503050406030204" pitchFamily="18" charset="0"/>
+                        </a:rPr>
+                        <m:t> </m:t>
+                      </m:r>
+                    </m:oMath>
+                  </m:oMathPara>
+                </a14:m>
+                <a:endParaRPr kumimoji="1" lang="zh-CN" altLang="en-US" dirty="0"/>
+              </a:p>
+            </p:txBody>
+          </p:sp>
+        </mc:Choice>
+        <mc:Fallback xmlns="">
+          <p:sp>
+            <p:nvSpPr>
+              <p:cNvPr id="18" name="文本框 17">
+                <a:extLst>
+                  <a:ext uri="{FF2B5EF4-FFF2-40B4-BE49-F238E27FC236}">
+                    <a16:creationId xmlns:a16="http://schemas.microsoft.com/office/drawing/2014/main" id="{2A298FF5-D7A8-7E85-83D5-04F6C623FE32}"/>
+                  </a:ext>
+                </a:extLst>
+              </p:cNvPr>
+              <p:cNvSpPr txBox="1">
+                <a:spLocks noRot="1" noChangeAspect="1" noMove="1" noResize="1" noEditPoints="1" noAdjustHandles="1" noChangeArrowheads="1" noChangeShapeType="1" noTextEdit="1"/>
+              </p:cNvSpPr>
+              <p:nvPr/>
+            </p:nvSpPr>
+            <p:spPr>
+              <a:xfrm>
+                <a:off x="2051955" y="2310730"/>
+                <a:ext cx="461554" cy="369332"/>
+              </a:xfrm>
+              <a:prstGeom prst="rect">
+                <a:avLst/>
+              </a:prstGeom>
+              <a:blipFill>
+                <a:blip r:embed="rId6"/>
+                <a:stretch>
+                  <a:fillRect r="-2703" b="-16129"/>
+                </a:stretch>
+              </a:blipFill>
+            </p:spPr>
+            <p:txBody>
+              <a:bodyPr/>
+              <a:lstStyle/>
+              <a:p>
+                <a:r>
+                  <a:rPr lang="zh-CN" altLang="en-US">
+                    <a:noFill/>
+                  </a:rPr>
+                  <a:t> </a:t>
+                </a:r>
+              </a:p>
+            </p:txBody>
+          </p:sp>
+        </mc:Fallback>
+      </mc:AlternateContent>
+      <mc:AlternateContent xmlns:mc="http://schemas.openxmlformats.org/markup-compatibility/2006" xmlns:a14="http://schemas.microsoft.com/office/drawing/2010/main">
+        <mc:Choice Requires="a14">
+          <p:sp>
+            <p:nvSpPr>
+              <p:cNvPr id="19" name="文本框 18">
+                <a:extLst>
+                  <a:ext uri="{FF2B5EF4-FFF2-40B4-BE49-F238E27FC236}">
+                    <a16:creationId xmlns:a16="http://schemas.microsoft.com/office/drawing/2014/main" id="{B9A2D018-E5B3-745C-12A4-337EFCCC52CB}"/>
+                  </a:ext>
+                </a:extLst>
+              </p:cNvPr>
+              <p:cNvSpPr txBox="1"/>
+              <p:nvPr/>
+            </p:nvSpPr>
+            <p:spPr>
+              <a:xfrm>
+                <a:off x="3461657" y="1764657"/>
+                <a:ext cx="461554" cy="369332"/>
+              </a:xfrm>
+              <a:prstGeom prst="rect">
+                <a:avLst/>
+              </a:prstGeom>
+              <a:noFill/>
+            </p:spPr>
+            <p:txBody>
+              <a:bodyPr wrap="square" rtlCol="0">
+                <a:spAutoFit/>
+              </a:bodyPr>
+              <a:lstStyle/>
+              <a:p>
+                <a:pPr/>
+                <a14:m>
+                  <m:oMathPara xmlns:m="http://schemas.openxmlformats.org/officeDocument/2006/math">
+                    <m:oMathParaPr>
+                      <m:jc m:val="centerGroup"/>
+                    </m:oMathParaPr>
+                    <m:oMath xmlns:m="http://schemas.openxmlformats.org/officeDocument/2006/math">
+                      <m:sSub>
+                        <m:sSubPr>
+                          <m:ctrlPr>
+                            <a:rPr kumimoji="1" lang="en-US" altLang="zh-CN" b="0" i="1" dirty="0" smtClean="0">
+                              <a:latin typeface="Cambria Math" panose="02040503050406030204" pitchFamily="18" charset="0"/>
+                            </a:rPr>
+                          </m:ctrlPr>
+                        </m:sSubPr>
+                        <m:e>
+                          <m:r>
+                            <a:rPr kumimoji="1" lang="en-US" altLang="zh-CN" b="0" i="1" dirty="0" smtClean="0">
+                              <a:latin typeface="Cambria Math" panose="02040503050406030204" pitchFamily="18" charset="0"/>
+                            </a:rPr>
+                            <m:t>𝑣</m:t>
+                          </m:r>
+                        </m:e>
+                        <m:sub>
+                          <m:r>
+                            <a:rPr kumimoji="1" lang="en-US" altLang="zh-CN" b="0" i="1" dirty="0" smtClean="0">
+                              <a:latin typeface="Cambria Math" panose="02040503050406030204" pitchFamily="18" charset="0"/>
+                            </a:rPr>
+                            <m:t>𝑖</m:t>
+                          </m:r>
+                        </m:sub>
+                      </m:sSub>
+                      <m:r>
+                        <a:rPr kumimoji="1" lang="zh-CN" altLang="en-US" i="1" dirty="0" smtClean="0">
+                          <a:latin typeface="Cambria Math" panose="02040503050406030204" pitchFamily="18" charset="0"/>
+                        </a:rPr>
+                        <m:t> </m:t>
+                      </m:r>
+                    </m:oMath>
+                  </m:oMathPara>
+                </a14:m>
+                <a:endParaRPr kumimoji="1" lang="zh-CN" altLang="en-US" dirty="0"/>
+              </a:p>
+            </p:txBody>
+          </p:sp>
+        </mc:Choice>
+        <mc:Fallback xmlns="">
+          <p:sp>
+            <p:nvSpPr>
+              <p:cNvPr id="19" name="文本框 18">
+                <a:extLst>
+                  <a:ext uri="{FF2B5EF4-FFF2-40B4-BE49-F238E27FC236}">
+                    <a16:creationId xmlns:a16="http://schemas.microsoft.com/office/drawing/2014/main" id="{B9A2D018-E5B3-745C-12A4-337EFCCC52CB}"/>
+                  </a:ext>
+                </a:extLst>
+              </p:cNvPr>
+              <p:cNvSpPr txBox="1">
+                <a:spLocks noRot="1" noChangeAspect="1" noMove="1" noResize="1" noEditPoints="1" noAdjustHandles="1" noChangeArrowheads="1" noChangeShapeType="1" noTextEdit="1"/>
+              </p:cNvSpPr>
+              <p:nvPr/>
+            </p:nvSpPr>
+            <p:spPr>
+              <a:xfrm>
+                <a:off x="3461657" y="1764657"/>
+                <a:ext cx="461554" cy="369332"/>
+              </a:xfrm>
+              <a:prstGeom prst="rect">
+                <a:avLst/>
+              </a:prstGeom>
+              <a:blipFill>
+                <a:blip r:embed="rId7"/>
+                <a:stretch>
+                  <a:fillRect b="-16667"/>
+                </a:stretch>
+              </a:blipFill>
+            </p:spPr>
+            <p:txBody>
+              <a:bodyPr/>
+              <a:lstStyle/>
+              <a:p>
+                <a:r>
+                  <a:rPr lang="zh-CN" altLang="en-US">
+                    <a:noFill/>
+                  </a:rPr>
+                  <a:t> </a:t>
+                </a:r>
+              </a:p>
+            </p:txBody>
+          </p:sp>
+        </mc:Fallback>
+      </mc:AlternateContent>
+      <p:sp>
+        <p:nvSpPr>
+          <p:cNvPr id="28" name="矩形 27">
+            <a:extLst>
+              <a:ext uri="{FF2B5EF4-FFF2-40B4-BE49-F238E27FC236}">
+                <a16:creationId xmlns:a16="http://schemas.microsoft.com/office/drawing/2014/main" id="{80B0AF29-8AC0-37BA-6D22-E46C86A3437C}"/>
+              </a:ext>
+            </a:extLst>
+          </p:cNvPr>
+          <p:cNvSpPr/>
+          <p:nvPr/>
+        </p:nvSpPr>
+        <p:spPr>
+          <a:xfrm>
+            <a:off x="557348" y="5260758"/>
+            <a:ext cx="748937" cy="169817"/>
+          </a:xfrm>
+          <a:prstGeom prst="rect">
+            <a:avLst/>
+          </a:prstGeom>
+          <a:solidFill>
+            <a:srgbClr val="FFC000"/>
+          </a:solidFill>
+        </p:spPr>
+        <p:style>
+          <a:lnRef idx="2">
+            <a:schemeClr val="accent1">
+              <a:shade val="15000"/>
+            </a:schemeClr>
+          </a:lnRef>
+          <a:fillRef idx="1">
+            <a:schemeClr val="accent1"/>
+          </a:fillRef>
+          <a:effectRef idx="0">
+            <a:schemeClr val="accent1"/>
+          </a:effectRef>
+          <a:fontRef idx="minor">
+            <a:schemeClr val="lt1"/>
+          </a:fontRef>
+        </p:style>
+        <p:txBody>
+          <a:bodyPr rtlCol="0" anchor="ctr"/>
+          <a:lstStyle/>
+          <a:p>
+            <a:pPr algn="ctr"/>
+            <a:endParaRPr kumimoji="1" lang="zh-CN" altLang="en-US" dirty="0">
+              <a:solidFill>
+                <a:schemeClr val="tx1"/>
+              </a:solidFill>
+              <a:latin typeface="Calibri" panose="020F0502020204030204" pitchFamily="34" charset="0"/>
+              <a:cs typeface="Calibri" panose="020F0502020204030204" pitchFamily="34" charset="0"/>
+            </a:endParaRPr>
+          </a:p>
+        </p:txBody>
+      </p:sp>
+      <mc:AlternateContent xmlns:mc="http://schemas.openxmlformats.org/markup-compatibility/2006" xmlns:a14="http://schemas.microsoft.com/office/drawing/2010/main">
+        <mc:Choice Requires="a14">
+          <p:sp>
+            <p:nvSpPr>
+              <p:cNvPr id="29" name="文本框 28">
+                <a:extLst>
+                  <a:ext uri="{FF2B5EF4-FFF2-40B4-BE49-F238E27FC236}">
+                    <a16:creationId xmlns:a16="http://schemas.microsoft.com/office/drawing/2014/main" id="{B348E3E3-26A9-2156-8E49-50FAC649CBA3}"/>
+                  </a:ext>
+                </a:extLst>
+              </p:cNvPr>
+              <p:cNvSpPr txBox="1"/>
+              <p:nvPr/>
+            </p:nvSpPr>
+            <p:spPr>
+              <a:xfrm>
+                <a:off x="169816" y="5117455"/>
+                <a:ext cx="461554" cy="369332"/>
+              </a:xfrm>
+              <a:prstGeom prst="rect">
+                <a:avLst/>
+              </a:prstGeom>
+              <a:noFill/>
+            </p:spPr>
+            <p:txBody>
+              <a:bodyPr wrap="square" rtlCol="0">
+                <a:spAutoFit/>
+              </a:bodyPr>
+              <a:lstStyle/>
+              <a:p>
+                <a:pPr/>
+                <a14:m>
+                  <m:oMathPara xmlns:m="http://schemas.openxmlformats.org/officeDocument/2006/math">
+                    <m:oMathParaPr>
+                      <m:jc m:val="centerGroup"/>
+                    </m:oMathParaPr>
+                    <m:oMath xmlns:m="http://schemas.openxmlformats.org/officeDocument/2006/math">
+                      <m:sSub>
+                        <m:sSubPr>
+                          <m:ctrlPr>
+                            <a:rPr kumimoji="1" lang="en-US" altLang="zh-CN" b="0" i="1" dirty="0" smtClean="0">
+                              <a:latin typeface="Cambria Math" panose="02040503050406030204" pitchFamily="18" charset="0"/>
+                            </a:rPr>
+                          </m:ctrlPr>
+                        </m:sSubPr>
+                        <m:e>
+                          <m:r>
+                            <a:rPr kumimoji="1" lang="en-US" altLang="zh-CN" b="0" i="1" dirty="0" smtClean="0">
+                              <a:latin typeface="Cambria Math" panose="02040503050406030204" pitchFamily="18" charset="0"/>
+                            </a:rPr>
+                            <m:t>𝑞</m:t>
+                          </m:r>
+                        </m:e>
+                        <m:sub>
+                          <m:r>
+                            <a:rPr kumimoji="1" lang="en-US" altLang="zh-CN" b="0" i="1" dirty="0" smtClean="0">
+                              <a:latin typeface="Cambria Math" panose="02040503050406030204" pitchFamily="18" charset="0"/>
+                            </a:rPr>
+                            <m:t>𝑖</m:t>
+                          </m:r>
+                        </m:sub>
+                      </m:sSub>
+                      <m:r>
+                        <a:rPr kumimoji="1" lang="zh-CN" altLang="en-US" i="1" dirty="0" smtClean="0">
+                          <a:latin typeface="Cambria Math" panose="02040503050406030204" pitchFamily="18" charset="0"/>
+                        </a:rPr>
+                        <m:t> </m:t>
+                      </m:r>
+                    </m:oMath>
+                  </m:oMathPara>
+                </a14:m>
+                <a:endParaRPr kumimoji="1" lang="zh-CN" altLang="en-US" dirty="0"/>
+              </a:p>
+            </p:txBody>
+          </p:sp>
+        </mc:Choice>
+        <mc:Fallback xmlns="">
+          <p:sp>
+            <p:nvSpPr>
+              <p:cNvPr id="29" name="文本框 28">
+                <a:extLst>
+                  <a:ext uri="{FF2B5EF4-FFF2-40B4-BE49-F238E27FC236}">
+                    <a16:creationId xmlns:a16="http://schemas.microsoft.com/office/drawing/2014/main" id="{B348E3E3-26A9-2156-8E49-50FAC649CBA3}"/>
+                  </a:ext>
+                </a:extLst>
+              </p:cNvPr>
+              <p:cNvSpPr txBox="1">
+                <a:spLocks noRot="1" noChangeAspect="1" noMove="1" noResize="1" noEditPoints="1" noAdjustHandles="1" noChangeArrowheads="1" noChangeShapeType="1" noTextEdit="1"/>
+              </p:cNvSpPr>
+              <p:nvPr/>
+            </p:nvSpPr>
+            <p:spPr>
+              <a:xfrm>
+                <a:off x="169816" y="5117455"/>
+                <a:ext cx="461554" cy="369332"/>
+              </a:xfrm>
+              <a:prstGeom prst="rect">
+                <a:avLst/>
+              </a:prstGeom>
+              <a:blipFill>
+                <a:blip r:embed="rId8"/>
+                <a:stretch>
+                  <a:fillRect r="-2703" b="-12903"/>
+                </a:stretch>
+              </a:blipFill>
+            </p:spPr>
+            <p:txBody>
+              <a:bodyPr/>
+              <a:lstStyle/>
+              <a:p>
+                <a:r>
+                  <a:rPr lang="zh-CN" altLang="en-US">
+                    <a:noFill/>
+                  </a:rPr>
+                  <a:t> </a:t>
+                </a:r>
+              </a:p>
+            </p:txBody>
+          </p:sp>
+        </mc:Fallback>
+      </mc:AlternateContent>
+      <mc:AlternateContent xmlns:mc="http://schemas.openxmlformats.org/markup-compatibility/2006">
+        <mc:Choice xmlns:a14="http://schemas.microsoft.com/office/drawing/2010/main" Requires="a14">
+          <p:sp>
+            <p:nvSpPr>
+              <p:cNvPr id="14" name="文本框 13">
+                <a:extLst>
+                  <a:ext uri="{FF2B5EF4-FFF2-40B4-BE49-F238E27FC236}">
+                    <a16:creationId xmlns:a16="http://schemas.microsoft.com/office/drawing/2014/main" id="{0DF691CE-0B5F-51C4-E628-26345BB52116}"/>
+                  </a:ext>
+                </a:extLst>
+              </p:cNvPr>
+              <p:cNvSpPr txBox="1"/>
+              <p:nvPr/>
+            </p:nvSpPr>
+            <p:spPr>
+              <a:xfrm>
+                <a:off x="9897286" y="2309835"/>
+                <a:ext cx="461554" cy="369332"/>
+              </a:xfrm>
+              <a:prstGeom prst="rect">
+                <a:avLst/>
+              </a:prstGeom>
+              <a:noFill/>
+            </p:spPr>
+            <p:txBody>
+              <a:bodyPr wrap="square" rtlCol="0">
+                <a:spAutoFit/>
+              </a:bodyPr>
+              <a:lstStyle/>
+              <a:p>
+                <a:pPr/>
+                <a14:m>
+                  <m:oMathPara xmlns:m="http://schemas.openxmlformats.org/officeDocument/2006/math">
+                    <m:oMathParaPr>
+                      <m:jc m:val="centerGroup"/>
+                    </m:oMathParaPr>
+                    <m:oMath xmlns:m="http://schemas.openxmlformats.org/officeDocument/2006/math">
+                      <m:sSub>
+                        <m:sSubPr>
+                          <m:ctrlPr>
+                            <a:rPr kumimoji="1" lang="en-US" altLang="zh-CN" b="0" i="1" dirty="0" smtClean="0">
+                              <a:latin typeface="Cambria Math" panose="02040503050406030204" pitchFamily="18" charset="0"/>
+                            </a:rPr>
+                          </m:ctrlPr>
+                        </m:sSubPr>
+                        <m:e>
+                          <m:r>
+                            <a:rPr kumimoji="1" lang="en-US" altLang="zh-CN" b="0" i="1" dirty="0" smtClean="0">
+                              <a:latin typeface="Cambria Math" panose="02040503050406030204" pitchFamily="18" charset="0"/>
+                            </a:rPr>
+                            <m:t>𝑣</m:t>
+                          </m:r>
+                        </m:e>
+                        <m:sub>
+                          <m:r>
+                            <a:rPr kumimoji="1" lang="en-US" altLang="zh-CN" b="0" i="1" dirty="0" smtClean="0">
+                              <a:latin typeface="Cambria Math" panose="02040503050406030204" pitchFamily="18" charset="0"/>
+                            </a:rPr>
+                            <m:t>𝑖</m:t>
+                          </m:r>
+                        </m:sub>
+                      </m:sSub>
+                      <m:r>
+                        <a:rPr kumimoji="1" lang="zh-CN" altLang="en-US" i="1" dirty="0" smtClean="0">
+                          <a:latin typeface="Cambria Math" panose="02040503050406030204" pitchFamily="18" charset="0"/>
+                        </a:rPr>
+                        <m:t> </m:t>
+                      </m:r>
+                    </m:oMath>
+                  </m:oMathPara>
+                </a14:m>
+                <a:endParaRPr kumimoji="1" lang="zh-CN" altLang="en-US" dirty="0"/>
+              </a:p>
+            </p:txBody>
+          </p:sp>
+        </mc:Choice>
+        <mc:Fallback>
+          <p:sp>
+            <p:nvSpPr>
+              <p:cNvPr id="14" name="文本框 13">
+                <a:extLst>
+                  <a:ext uri="{FF2B5EF4-FFF2-40B4-BE49-F238E27FC236}">
+                    <a16:creationId xmlns:a16="http://schemas.microsoft.com/office/drawing/2014/main" id="{0DF691CE-0B5F-51C4-E628-26345BB52116}"/>
+                  </a:ext>
+                </a:extLst>
+              </p:cNvPr>
+              <p:cNvSpPr txBox="1">
+                <a:spLocks noRot="1" noChangeAspect="1" noMove="1" noResize="1" noEditPoints="1" noAdjustHandles="1" noChangeArrowheads="1" noChangeShapeType="1" noTextEdit="1"/>
+              </p:cNvSpPr>
+              <p:nvPr/>
+            </p:nvSpPr>
+            <p:spPr>
+              <a:xfrm>
+                <a:off x="9897286" y="2309835"/>
+                <a:ext cx="461554" cy="369332"/>
+              </a:xfrm>
+              <a:prstGeom prst="rect">
+                <a:avLst/>
+              </a:prstGeom>
+              <a:blipFill>
+                <a:blip r:embed="rId9"/>
+                <a:stretch>
+                  <a:fillRect r="-2703" b="-16667"/>
+                </a:stretch>
+              </a:blipFill>
+            </p:spPr>
+            <p:txBody>
+              <a:bodyPr/>
+              <a:lstStyle/>
+              <a:p>
+                <a:r>
+                  <a:rPr lang="zh-CN" altLang="en-US">
+                    <a:noFill/>
+                  </a:rPr>
+                  <a:t> </a:t>
+                </a:r>
+              </a:p>
+            </p:txBody>
+          </p:sp>
+        </mc:Fallback>
+      </mc:AlternateContent>
+      <p:sp>
+        <p:nvSpPr>
+          <p:cNvPr id="9" name="矩形 8">
+            <a:extLst>
+              <a:ext uri="{FF2B5EF4-FFF2-40B4-BE49-F238E27FC236}">
+                <a16:creationId xmlns:a16="http://schemas.microsoft.com/office/drawing/2014/main" id="{764AA410-DF38-B4F3-1AE0-3134786A3039}"/>
+              </a:ext>
+            </a:extLst>
+          </p:cNvPr>
+          <p:cNvSpPr/>
+          <p:nvPr/>
+        </p:nvSpPr>
+        <p:spPr>
+          <a:xfrm>
+            <a:off x="9753596" y="2662532"/>
+            <a:ext cx="748937" cy="169817"/>
+          </a:xfrm>
+          <a:prstGeom prst="rect">
+            <a:avLst/>
+          </a:prstGeom>
+          <a:solidFill>
+            <a:schemeClr val="accent5">
+              <a:lumMod val="20000"/>
+              <a:lumOff val="80000"/>
+            </a:schemeClr>
+          </a:solidFill>
+          <a:ln>
+            <a:solidFill>
+              <a:schemeClr val="tx1">
+                <a:lumMod val="95000"/>
+                <a:lumOff val="5000"/>
+              </a:schemeClr>
+            </a:solidFill>
+          </a:ln>
+        </p:spPr>
+        <p:style>
+          <a:lnRef idx="2">
+            <a:schemeClr val="accent1">
+              <a:shade val="15000"/>
+            </a:schemeClr>
+          </a:lnRef>
+          <a:fillRef idx="1">
+            <a:schemeClr val="accent1"/>
+          </a:fillRef>
+          <a:effectRef idx="0">
+            <a:schemeClr val="accent1"/>
+          </a:effectRef>
+          <a:fontRef idx="minor">
+            <a:schemeClr val="lt1"/>
+          </a:fontRef>
+        </p:style>
+        <p:txBody>
+          <a:bodyPr rtlCol="0" anchor="ctr"/>
+          <a:lstStyle/>
+          <a:p>
+            <a:pPr algn="ctr"/>
+            <a:endParaRPr kumimoji="1" lang="zh-CN" altLang="en-US" dirty="0">
+              <a:solidFill>
+                <a:schemeClr val="tx1"/>
+              </a:solidFill>
+              <a:latin typeface="Calibri" panose="020F0502020204030204" pitchFamily="34" charset="0"/>
+              <a:cs typeface="Calibri" panose="020F0502020204030204" pitchFamily="34" charset="0"/>
+            </a:endParaRPr>
+          </a:p>
+        </p:txBody>
+      </p:sp>
+      <p:sp>
+        <p:nvSpPr>
+          <p:cNvPr id="11" name="矩形 10">
+            <a:extLst>
+              <a:ext uri="{FF2B5EF4-FFF2-40B4-BE49-F238E27FC236}">
+                <a16:creationId xmlns:a16="http://schemas.microsoft.com/office/drawing/2014/main" id="{EB57AF90-EC28-B331-3811-E14D83C2D0C6}"/>
+              </a:ext>
+            </a:extLst>
+          </p:cNvPr>
+          <p:cNvSpPr/>
+          <p:nvPr/>
+        </p:nvSpPr>
+        <p:spPr>
+          <a:xfrm>
+            <a:off x="9431380" y="2993456"/>
+            <a:ext cx="169817" cy="748938"/>
+          </a:xfrm>
+          <a:prstGeom prst="rect">
+            <a:avLst/>
+          </a:prstGeom>
+          <a:solidFill>
+            <a:schemeClr val="accent4">
+              <a:lumMod val="20000"/>
+              <a:lumOff val="80000"/>
+            </a:schemeClr>
+          </a:solidFill>
+          <a:ln>
+            <a:solidFill>
+              <a:schemeClr val="tx1">
+                <a:lumMod val="95000"/>
+                <a:lumOff val="5000"/>
+              </a:schemeClr>
+            </a:solidFill>
+          </a:ln>
+        </p:spPr>
+        <p:style>
+          <a:lnRef idx="2">
+            <a:schemeClr val="accent1">
+              <a:shade val="15000"/>
+            </a:schemeClr>
+          </a:lnRef>
+          <a:fillRef idx="1">
+            <a:schemeClr val="accent1"/>
+          </a:fillRef>
+          <a:effectRef idx="0">
+            <a:schemeClr val="accent1"/>
+          </a:effectRef>
+          <a:fontRef idx="minor">
+            <a:schemeClr val="lt1"/>
+          </a:fontRef>
+        </p:style>
+        <p:txBody>
+          <a:bodyPr rtlCol="0" anchor="ctr"/>
+          <a:lstStyle/>
+          <a:p>
+            <a:pPr algn="ctr"/>
+            <a:endParaRPr kumimoji="1" lang="zh-CN" altLang="en-US" dirty="0">
+              <a:solidFill>
+                <a:schemeClr val="tx1"/>
+              </a:solidFill>
+              <a:latin typeface="Calibri" panose="020F0502020204030204" pitchFamily="34" charset="0"/>
+              <a:cs typeface="Calibri" panose="020F0502020204030204" pitchFamily="34" charset="0"/>
+            </a:endParaRPr>
+          </a:p>
+        </p:txBody>
+      </p:sp>
+      <mc:AlternateContent xmlns:mc="http://schemas.openxmlformats.org/markup-compatibility/2006">
+        <mc:Choice xmlns:a14="http://schemas.microsoft.com/office/drawing/2010/main" Requires="a14">
+          <p:sp>
+            <p:nvSpPr>
+              <p:cNvPr id="12" name="矩形 11">
+                <a:extLst>
+                  <a:ext uri="{FF2B5EF4-FFF2-40B4-BE49-F238E27FC236}">
+                    <a16:creationId xmlns:a16="http://schemas.microsoft.com/office/drawing/2014/main" id="{1CFF896B-4C3B-27C0-E344-6C5C2CF3E3E8}"/>
+                  </a:ext>
+                </a:extLst>
+              </p:cNvPr>
+              <p:cNvSpPr/>
+              <p:nvPr/>
+            </p:nvSpPr>
+            <p:spPr>
+              <a:xfrm>
+                <a:off x="9753595" y="2993456"/>
+                <a:ext cx="748937" cy="748938"/>
+              </a:xfrm>
+              <a:prstGeom prst="rect">
+                <a:avLst/>
+              </a:prstGeom>
+              <a:solidFill>
+                <a:schemeClr val="accent2">
+                  <a:lumMod val="20000"/>
+                  <a:lumOff val="80000"/>
+                </a:schemeClr>
+              </a:solidFill>
+              <a:ln>
+                <a:solidFill>
+                  <a:schemeClr val="tx1">
+                    <a:lumMod val="95000"/>
+                    <a:lumOff val="5000"/>
+                  </a:schemeClr>
+                </a:solidFill>
+              </a:ln>
+            </p:spPr>
+            <p:style>
+              <a:lnRef idx="2">
+                <a:schemeClr val="accent1">
+                  <a:shade val="15000"/>
+                </a:schemeClr>
+              </a:lnRef>
+              <a:fillRef idx="1">
+                <a:schemeClr val="accent1"/>
+              </a:fillRef>
+              <a:effectRef idx="0">
+                <a:schemeClr val="accent1"/>
+              </a:effectRef>
+              <a:fontRef idx="minor">
+                <a:schemeClr val="lt1"/>
+              </a:fontRef>
+            </p:style>
+            <p:txBody>
+              <a:bodyPr rtlCol="0" anchor="ctr"/>
+              <a:lstStyle/>
+              <a:p>
+                <a:pPr algn="ctr"/>
+                <a14:m>
+                  <m:oMathPara xmlns:m="http://schemas.openxmlformats.org/officeDocument/2006/math">
+                    <m:oMathParaPr>
+                      <m:jc m:val="centerGroup"/>
+                    </m:oMathParaPr>
+                    <m:oMath xmlns:m="http://schemas.openxmlformats.org/officeDocument/2006/math">
+                      <m:sSub>
+                        <m:sSubPr>
+                          <m:ctrlPr>
+                            <a:rPr kumimoji="1" lang="en-US" altLang="zh-CN" sz="2000" b="0" i="1" smtClean="0">
+                              <a:solidFill>
+                                <a:schemeClr val="tx1"/>
+                              </a:solidFill>
+                              <a:latin typeface="Cambria Math" panose="02040503050406030204" pitchFamily="18" charset="0"/>
+                              <a:cs typeface="Calibri" panose="020F0502020204030204" pitchFamily="34" charset="0"/>
+                            </a:rPr>
+                          </m:ctrlPr>
+                        </m:sSubPr>
+                        <m:e>
+                          <m:r>
+                            <a:rPr kumimoji="1" lang="en-US" altLang="zh-CN" sz="2000" b="0" i="1" smtClean="0">
+                              <a:solidFill>
+                                <a:schemeClr val="tx1"/>
+                              </a:solidFill>
+                              <a:latin typeface="Cambria Math" panose="02040503050406030204" pitchFamily="18" charset="0"/>
+                              <a:cs typeface="Calibri" panose="020F0502020204030204" pitchFamily="34" charset="0"/>
+                            </a:rPr>
+                            <m:t>𝑠</m:t>
+                          </m:r>
+                        </m:e>
+                        <m:sub>
+                          <m:r>
+                            <a:rPr kumimoji="1" lang="en-US" altLang="zh-CN" sz="2000" b="0" i="1" smtClean="0">
+                              <a:solidFill>
+                                <a:schemeClr val="tx1"/>
+                              </a:solidFill>
+                              <a:latin typeface="Cambria Math" panose="02040503050406030204" pitchFamily="18" charset="0"/>
+                              <a:cs typeface="Calibri" panose="020F0502020204030204" pitchFamily="34" charset="0"/>
+                            </a:rPr>
+                            <m:t>𝑡</m:t>
+                          </m:r>
+                        </m:sub>
+                      </m:sSub>
+                    </m:oMath>
+                  </m:oMathPara>
+                </a14:m>
+                <a:endParaRPr kumimoji="1" lang="zh-CN" altLang="en-US" sz="2000" dirty="0">
+                  <a:solidFill>
+                    <a:schemeClr val="tx1"/>
+                  </a:solidFill>
+                  <a:latin typeface="Calibri" panose="020F0502020204030204" pitchFamily="34" charset="0"/>
+                  <a:cs typeface="Calibri" panose="020F0502020204030204" pitchFamily="34" charset="0"/>
+                </a:endParaRPr>
+              </a:p>
+            </p:txBody>
+          </p:sp>
+        </mc:Choice>
+        <mc:Fallback>
+          <p:sp>
+            <p:nvSpPr>
+              <p:cNvPr id="12" name="矩形 11">
+                <a:extLst>
+                  <a:ext uri="{FF2B5EF4-FFF2-40B4-BE49-F238E27FC236}">
+                    <a16:creationId xmlns:a16="http://schemas.microsoft.com/office/drawing/2014/main" id="{1CFF896B-4C3B-27C0-E344-6C5C2CF3E3E8}"/>
+                  </a:ext>
+                </a:extLst>
+              </p:cNvPr>
+              <p:cNvSpPr>
+                <a:spLocks noRot="1" noChangeAspect="1" noMove="1" noResize="1" noEditPoints="1" noAdjustHandles="1" noChangeArrowheads="1" noChangeShapeType="1" noTextEdit="1"/>
+              </p:cNvSpPr>
+              <p:nvPr/>
+            </p:nvSpPr>
+            <p:spPr>
+              <a:xfrm>
+                <a:off x="9753595" y="2993456"/>
+                <a:ext cx="748937" cy="748938"/>
+              </a:xfrm>
+              <a:prstGeom prst="rect">
+                <a:avLst/>
+              </a:prstGeom>
+              <a:blipFill>
+                <a:blip r:embed="rId10"/>
+                <a:stretch>
+                  <a:fillRect/>
+                </a:stretch>
+              </a:blipFill>
+              <a:ln>
+                <a:solidFill>
+                  <a:schemeClr val="tx1">
+                    <a:lumMod val="95000"/>
+                    <a:lumOff val="5000"/>
+                  </a:schemeClr>
+                </a:solidFill>
+              </a:ln>
+            </p:spPr>
+            <p:txBody>
+              <a:bodyPr/>
+              <a:lstStyle/>
+              <a:p>
+                <a:r>
+                  <a:rPr lang="zh-CN" altLang="en-US">
+                    <a:noFill/>
+                  </a:rPr>
+                  <a:t> </a:t>
+                </a:r>
+              </a:p>
+            </p:txBody>
+          </p:sp>
+        </mc:Fallback>
+      </mc:AlternateContent>
+      <mc:AlternateContent xmlns:mc="http://schemas.openxmlformats.org/markup-compatibility/2006">
+        <mc:Choice xmlns:a14="http://schemas.microsoft.com/office/drawing/2010/main" Requires="a14">
+          <p:sp>
+            <p:nvSpPr>
+              <p:cNvPr id="13" name="文本框 12">
+                <a:extLst>
+                  <a:ext uri="{FF2B5EF4-FFF2-40B4-BE49-F238E27FC236}">
+                    <a16:creationId xmlns:a16="http://schemas.microsoft.com/office/drawing/2014/main" id="{D07FE843-B492-E66F-06A9-DA2856D3E6C1}"/>
+                  </a:ext>
+                </a:extLst>
+              </p:cNvPr>
+              <p:cNvSpPr txBox="1"/>
+              <p:nvPr/>
+            </p:nvSpPr>
+            <p:spPr>
+              <a:xfrm>
+                <a:off x="9078686" y="3183259"/>
+                <a:ext cx="461554" cy="369332"/>
+              </a:xfrm>
+              <a:prstGeom prst="rect">
+                <a:avLst/>
+              </a:prstGeom>
+              <a:noFill/>
+            </p:spPr>
+            <p:txBody>
+              <a:bodyPr wrap="square" rtlCol="0">
+                <a:spAutoFit/>
+              </a:bodyPr>
+              <a:lstStyle/>
+              <a:p>
+                <a:pPr/>
                 <a14:m>
                   <m:oMathPara xmlns:m="http://schemas.openxmlformats.org/officeDocument/2006/math">
                     <m:oMathParaPr>
@@ -4011,10 +4851,10 @@
         <mc:Fallback>
           <p:sp>
             <p:nvSpPr>
-              <p:cNvPr id="18" name="文本框 17">
+              <p:cNvPr id="13" name="文本框 12">
                 <a:extLst>
                   <a:ext uri="{FF2B5EF4-FFF2-40B4-BE49-F238E27FC236}">
-                    <a16:creationId xmlns:a16="http://schemas.microsoft.com/office/drawing/2014/main" id="{2A298FF5-D7A8-7E85-83D5-04F6C623FE32}"/>
+                    <a16:creationId xmlns:a16="http://schemas.microsoft.com/office/drawing/2014/main" id="{D07FE843-B492-E66F-06A9-DA2856D3E6C1}"/>
                   </a:ext>
                 </a:extLst>
               </p:cNvPr>
@@ -4025,16 +4865,16 @@
             </p:nvSpPr>
             <p:spPr>
               <a:xfrm>
-                <a:off x="2051955" y="2310730"/>
+                <a:off x="9078686" y="3183259"/>
                 <a:ext cx="461554" cy="369332"/>
               </a:xfrm>
               <a:prstGeom prst="rect">
                 <a:avLst/>
               </a:prstGeom>
               <a:blipFill>
-                <a:blip r:embed="rId6"/>
+                <a:blip r:embed="rId11"/>
                 <a:stretch>
-                  <a:fillRect r="-2703" b="-16129"/>
+                  <a:fillRect r="-2632" b="-16667"/>
                 </a:stretch>
               </a:blipFill>
             </p:spPr>
@@ -4057,10 +4897,253 @@
         <mc:Choice xmlns:a14="http://schemas.microsoft.com/office/drawing/2010/main" Requires="a14">
           <p:sp>
             <p:nvSpPr>
-              <p:cNvPr id="19" name="文本框 18">
+              <p:cNvPr id="15" name="矩形 14">
                 <a:extLst>
                   <a:ext uri="{FF2B5EF4-FFF2-40B4-BE49-F238E27FC236}">
-                    <a16:creationId xmlns:a16="http://schemas.microsoft.com/office/drawing/2014/main" id="{B9A2D018-E5B3-745C-12A4-337EFCCC52CB}"/>
+                    <a16:creationId xmlns:a16="http://schemas.microsoft.com/office/drawing/2014/main" id="{0C27CBBF-4B23-7C60-012D-25F0119F35AB}"/>
+                  </a:ext>
+                </a:extLst>
+              </p:cNvPr>
+              <p:cNvSpPr/>
+              <p:nvPr/>
+            </p:nvSpPr>
+            <p:spPr>
+              <a:xfrm>
+                <a:off x="8005356" y="2993456"/>
+                <a:ext cx="748937" cy="748938"/>
+              </a:xfrm>
+              <a:prstGeom prst="rect">
+                <a:avLst/>
+              </a:prstGeom>
+              <a:solidFill>
+                <a:schemeClr val="accent6">
+                  <a:lumMod val="20000"/>
+                  <a:lumOff val="80000"/>
+                </a:schemeClr>
+              </a:solidFill>
+              <a:ln>
+                <a:solidFill>
+                  <a:schemeClr val="tx1">
+                    <a:lumMod val="95000"/>
+                    <a:lumOff val="5000"/>
+                  </a:schemeClr>
+                </a:solidFill>
+              </a:ln>
+            </p:spPr>
+            <p:style>
+              <a:lnRef idx="2">
+                <a:schemeClr val="accent1">
+                  <a:shade val="15000"/>
+                </a:schemeClr>
+              </a:lnRef>
+              <a:fillRef idx="1">
+                <a:schemeClr val="accent1"/>
+              </a:fillRef>
+              <a:effectRef idx="0">
+                <a:schemeClr val="accent1"/>
+              </a:effectRef>
+              <a:fontRef idx="minor">
+                <a:schemeClr val="lt1"/>
+              </a:fontRef>
+            </p:style>
+            <p:txBody>
+              <a:bodyPr rtlCol="0" anchor="ctr"/>
+              <a:lstStyle/>
+              <a:p>
+                <a:pPr algn="ctr"/>
+                <a14:m>
+                  <m:oMathPara xmlns:m="http://schemas.openxmlformats.org/officeDocument/2006/math">
+                    <m:oMathParaPr>
+                      <m:jc m:val="centerGroup"/>
+                    </m:oMathParaPr>
+                    <m:oMath xmlns:m="http://schemas.openxmlformats.org/officeDocument/2006/math">
+                      <m:sSub>
+                        <m:sSubPr>
+                          <m:ctrlPr>
+                            <a:rPr kumimoji="1" lang="en-US" altLang="zh-CN" sz="2000" b="0" i="1" smtClean="0">
+                              <a:solidFill>
+                                <a:schemeClr val="tx1"/>
+                              </a:solidFill>
+                              <a:latin typeface="Cambria Math" panose="02040503050406030204" pitchFamily="18" charset="0"/>
+                              <a:cs typeface="Calibri" panose="020F0502020204030204" pitchFamily="34" charset="0"/>
+                            </a:rPr>
+                          </m:ctrlPr>
+                        </m:sSubPr>
+                        <m:e>
+                          <m:r>
+                            <a:rPr kumimoji="1" lang="en-US" altLang="zh-CN" sz="2000" b="0" i="1" smtClean="0">
+                              <a:solidFill>
+                                <a:schemeClr val="tx1"/>
+                              </a:solidFill>
+                              <a:latin typeface="Cambria Math" panose="02040503050406030204" pitchFamily="18" charset="0"/>
+                              <a:cs typeface="Calibri" panose="020F0502020204030204" pitchFamily="34" charset="0"/>
+                            </a:rPr>
+                            <m:t>h</m:t>
+                          </m:r>
+                        </m:e>
+                        <m:sub>
+                          <m:r>
+                            <a:rPr kumimoji="1" lang="en-US" altLang="zh-CN" sz="2000" b="0" i="1" smtClean="0">
+                              <a:solidFill>
+                                <a:schemeClr val="tx1"/>
+                              </a:solidFill>
+                              <a:latin typeface="Cambria Math" panose="02040503050406030204" pitchFamily="18" charset="0"/>
+                              <a:cs typeface="Calibri" panose="020F0502020204030204" pitchFamily="34" charset="0"/>
+                            </a:rPr>
+                            <m:t>𝑖</m:t>
+                          </m:r>
+                          <m:r>
+                            <a:rPr kumimoji="1" lang="en-US" altLang="zh-CN" sz="2000" b="0" i="1" smtClean="0">
+                              <a:solidFill>
+                                <a:schemeClr val="tx1"/>
+                              </a:solidFill>
+                              <a:latin typeface="Cambria Math" panose="02040503050406030204" pitchFamily="18" charset="0"/>
+                              <a:cs typeface="Calibri" panose="020F0502020204030204" pitchFamily="34" charset="0"/>
+                            </a:rPr>
+                            <m:t>−1</m:t>
+                          </m:r>
+                        </m:sub>
+                      </m:sSub>
+                    </m:oMath>
+                  </m:oMathPara>
+                </a14:m>
+                <a:endParaRPr kumimoji="1" lang="zh-CN" altLang="en-US" sz="2000" dirty="0">
+                  <a:solidFill>
+                    <a:schemeClr val="tx1"/>
+                  </a:solidFill>
+                  <a:latin typeface="Calibri" panose="020F0502020204030204" pitchFamily="34" charset="0"/>
+                  <a:cs typeface="Calibri" panose="020F0502020204030204" pitchFamily="34" charset="0"/>
+                </a:endParaRPr>
+              </a:p>
+            </p:txBody>
+          </p:sp>
+        </mc:Choice>
+        <mc:Fallback>
+          <p:sp>
+            <p:nvSpPr>
+              <p:cNvPr id="15" name="矩形 14">
+                <a:extLst>
+                  <a:ext uri="{FF2B5EF4-FFF2-40B4-BE49-F238E27FC236}">
+                    <a16:creationId xmlns:a16="http://schemas.microsoft.com/office/drawing/2014/main" id="{0C27CBBF-4B23-7C60-012D-25F0119F35AB}"/>
+                  </a:ext>
+                </a:extLst>
+              </p:cNvPr>
+              <p:cNvSpPr>
+                <a:spLocks noRot="1" noChangeAspect="1" noMove="1" noResize="1" noEditPoints="1" noAdjustHandles="1" noChangeArrowheads="1" noChangeShapeType="1" noTextEdit="1"/>
+              </p:cNvSpPr>
+              <p:nvPr/>
+            </p:nvSpPr>
+            <p:spPr>
+              <a:xfrm>
+                <a:off x="8005356" y="2993456"/>
+                <a:ext cx="748937" cy="748938"/>
+              </a:xfrm>
+              <a:prstGeom prst="rect">
+                <a:avLst/>
+              </a:prstGeom>
+              <a:blipFill>
+                <a:blip r:embed="rId12"/>
+                <a:stretch>
+                  <a:fillRect/>
+                </a:stretch>
+              </a:blipFill>
+              <a:ln>
+                <a:solidFill>
+                  <a:schemeClr val="tx1">
+                    <a:lumMod val="95000"/>
+                    <a:lumOff val="5000"/>
+                  </a:schemeClr>
+                </a:solidFill>
+              </a:ln>
+            </p:spPr>
+            <p:txBody>
+              <a:bodyPr/>
+              <a:lstStyle/>
+              <a:p>
+                <a:r>
+                  <a:rPr lang="zh-CN" altLang="en-US">
+                    <a:noFill/>
+                  </a:rPr>
+                  <a:t> </a:t>
+                </a:r>
+              </a:p>
+            </p:txBody>
+          </p:sp>
+        </mc:Fallback>
+      </mc:AlternateContent>
+      <p:sp>
+        <p:nvSpPr>
+          <p:cNvPr id="20" name="矩形 19">
+            <a:extLst>
+              <a:ext uri="{FF2B5EF4-FFF2-40B4-BE49-F238E27FC236}">
+                <a16:creationId xmlns:a16="http://schemas.microsoft.com/office/drawing/2014/main" id="{55902FB2-3A15-FE5C-0EA1-BA7FA8493466}"/>
+              </a:ext>
+            </a:extLst>
+          </p:cNvPr>
+          <p:cNvSpPr/>
+          <p:nvPr/>
+        </p:nvSpPr>
+        <p:spPr>
+          <a:xfrm>
+            <a:off x="7660283" y="2993456"/>
+            <a:ext cx="151305" cy="748938"/>
+          </a:xfrm>
+          <a:prstGeom prst="rect">
+            <a:avLst/>
+          </a:prstGeom>
+          <a:solidFill>
+            <a:schemeClr val="bg1">
+              <a:lumMod val="95000"/>
+            </a:schemeClr>
+          </a:solidFill>
+          <a:ln>
+            <a:solidFill>
+              <a:schemeClr val="tx1">
+                <a:lumMod val="95000"/>
+                <a:lumOff val="5000"/>
+              </a:schemeClr>
+            </a:solidFill>
+          </a:ln>
+        </p:spPr>
+        <p:style>
+          <a:lnRef idx="2">
+            <a:schemeClr val="accent1">
+              <a:shade val="15000"/>
+            </a:schemeClr>
+          </a:lnRef>
+          <a:fillRef idx="1">
+            <a:schemeClr val="accent1"/>
+          </a:fillRef>
+          <a:effectRef idx="0">
+            <a:schemeClr val="accent1"/>
+          </a:effectRef>
+          <a:fontRef idx="minor">
+            <a:schemeClr val="lt1"/>
+          </a:fontRef>
+        </p:style>
+        <p:txBody>
+          <a:bodyPr rtlCol="0" anchor="ctr"/>
+          <a:lstStyle/>
+          <a:p>
+            <a:pPr algn="ctr"/>
+            <a:endParaRPr kumimoji="1" lang="zh-CN" altLang="en-US" sz="2000" dirty="0">
+              <a:solidFill>
+                <a:schemeClr val="tx1"/>
+              </a:solidFill>
+              <a:latin typeface="Calibri" panose="020F0502020204030204" pitchFamily="34" charset="0"/>
+              <a:cs typeface="Calibri" panose="020F0502020204030204" pitchFamily="34" charset="0"/>
+            </a:endParaRPr>
+          </a:p>
+        </p:txBody>
+      </p:sp>
+      <mc:AlternateContent xmlns:mc="http://schemas.openxmlformats.org/markup-compatibility/2006">
+        <mc:Choice xmlns:a14="http://schemas.microsoft.com/office/drawing/2010/main" Requires="a14">
+          <p:sp>
+            <p:nvSpPr>
+              <p:cNvPr id="21" name="文本框 20">
+                <a:extLst>
+                  <a:ext uri="{FF2B5EF4-FFF2-40B4-BE49-F238E27FC236}">
+                    <a16:creationId xmlns:a16="http://schemas.microsoft.com/office/drawing/2014/main" id="{F527022D-A830-FFD7-5173-AB87D66CCBD2}"/>
                   </a:ext>
                 </a:extLst>
               </p:cNvPr>
@@ -4069,7 +5152,7 @@
             </p:nvSpPr>
             <p:spPr>
               <a:xfrm>
-                <a:off x="3461657" y="1764657"/>
+                <a:off x="7688584" y="3183259"/>
                 <a:ext cx="461554" cy="369332"/>
               </a:xfrm>
               <a:prstGeom prst="rect">
@@ -4083,47 +5166,30 @@
               </a:bodyPr>
               <a:lstStyle/>
               <a:p>
+                <a:pPr/>
                 <a14:m>
                   <m:oMathPara xmlns:m="http://schemas.openxmlformats.org/officeDocument/2006/math">
                     <m:oMathParaPr>
                       <m:jc m:val="centerGroup"/>
                     </m:oMathParaPr>
                     <m:oMath xmlns:m="http://schemas.openxmlformats.org/officeDocument/2006/math">
-                      <m:sSub>
-                        <m:sSubPr>
-                          <m:ctrlPr>
-                            <a:rPr kumimoji="1" lang="en-US" altLang="zh-CN" b="0" i="1" dirty="0" smtClean="0">
-                              <a:latin typeface="Cambria Math" panose="02040503050406030204" pitchFamily="18" charset="0"/>
-                            </a:rPr>
-                          </m:ctrlPr>
-                        </m:sSubPr>
-                        <m:e>
-                          <m:r>
-                            <a:rPr kumimoji="1" lang="en-US" altLang="zh-CN" b="0" i="1" dirty="0" smtClean="0">
-                              <a:latin typeface="Cambria Math" panose="02040503050406030204" pitchFamily="18" charset="0"/>
-                            </a:rPr>
-                            <m:t>𝑣</m:t>
-                          </m:r>
-                        </m:e>
-                        <m:sub>
-                          <m:r>
-                            <a:rPr kumimoji="1" lang="en-US" altLang="zh-CN" b="0" i="1" dirty="0" smtClean="0">
-                              <a:latin typeface="Cambria Math" panose="02040503050406030204" pitchFamily="18" charset="0"/>
-                            </a:rPr>
-                            <m:t>𝑖</m:t>
-                          </m:r>
-                        </m:sub>
-                      </m:sSub>
                       <m:r>
-                        <a:rPr kumimoji="1" lang="zh-CN" altLang="en-US" i="1" dirty="0" smtClean="0">
+                        <a:rPr kumimoji="1" lang="zh-CN" altLang="en-US" b="1" i="1" dirty="0" smtClean="0">
+                          <a:solidFill>
+                            <a:srgbClr val="FF0000"/>
+                          </a:solidFill>
                           <a:latin typeface="Cambria Math" panose="02040503050406030204" pitchFamily="18" charset="0"/>
                         </a:rPr>
-                        <m:t> </m:t>
+                        <m:t>∗</m:t>
                       </m:r>
                     </m:oMath>
                   </m:oMathPara>
                 </a14:m>
-                <a:endParaRPr kumimoji="1" lang="zh-CN" altLang="en-US" dirty="0"/>
+                <a:endParaRPr kumimoji="1" lang="zh-CN" altLang="en-US" b="1" dirty="0">
+                  <a:solidFill>
+                    <a:srgbClr val="FF0000"/>
+                  </a:solidFill>
+                </a:endParaRPr>
               </a:p>
             </p:txBody>
           </p:sp>
@@ -4131,10 +5197,10 @@
         <mc:Fallback>
           <p:sp>
             <p:nvSpPr>
-              <p:cNvPr id="19" name="文本框 18">
+              <p:cNvPr id="21" name="文本框 20">
                 <a:extLst>
                   <a:ext uri="{FF2B5EF4-FFF2-40B4-BE49-F238E27FC236}">
-                    <a16:creationId xmlns:a16="http://schemas.microsoft.com/office/drawing/2014/main" id="{B9A2D018-E5B3-745C-12A4-337EFCCC52CB}"/>
+                    <a16:creationId xmlns:a16="http://schemas.microsoft.com/office/drawing/2014/main" id="{F527022D-A830-FFD7-5173-AB87D66CCBD2}"/>
                   </a:ext>
                 </a:extLst>
               </p:cNvPr>
@@ -4145,16 +5211,16 @@
             </p:nvSpPr>
             <p:spPr>
               <a:xfrm>
-                <a:off x="3461657" y="1764657"/>
+                <a:off x="7688584" y="3183259"/>
                 <a:ext cx="461554" cy="369332"/>
               </a:xfrm>
               <a:prstGeom prst="rect">
                 <a:avLst/>
               </a:prstGeom>
               <a:blipFill>
-                <a:blip r:embed="rId7"/>
+                <a:blip r:embed="rId13"/>
                 <a:stretch>
-                  <a:fillRect b="-16667"/>
+                  <a:fillRect/>
                 </a:stretch>
               </a:blipFill>
             </p:spPr>
@@ -4173,12 +5239,108 @@
           </p:sp>
         </mc:Fallback>
       </mc:AlternateContent>
-      <p:sp>
-        <p:nvSpPr>
-          <p:cNvPr id="28" name="矩形 27">
-            <a:extLst>
-              <a:ext uri="{FF2B5EF4-FFF2-40B4-BE49-F238E27FC236}">
-                <a16:creationId xmlns:a16="http://schemas.microsoft.com/office/drawing/2014/main" id="{80B0AF29-8AC0-37BA-6D22-E46C86A3437C}"/>
+      <mc:AlternateContent xmlns:mc="http://schemas.openxmlformats.org/markup-compatibility/2006">
+        <mc:Choice xmlns:a14="http://schemas.microsoft.com/office/drawing/2010/main" Requires="a14">
+          <p:sp>
+            <p:nvSpPr>
+              <p:cNvPr id="22" name="文本框 21">
+                <a:extLst>
+                  <a:ext uri="{FF2B5EF4-FFF2-40B4-BE49-F238E27FC236}">
+                    <a16:creationId xmlns:a16="http://schemas.microsoft.com/office/drawing/2014/main" id="{C488FAEE-CA1B-B2B7-8ECD-9806F0C6FEB9}"/>
+                  </a:ext>
+                </a:extLst>
+              </p:cNvPr>
+              <p:cNvSpPr txBox="1"/>
+              <p:nvPr/>
+            </p:nvSpPr>
+            <p:spPr>
+              <a:xfrm>
+                <a:off x="8769535" y="3183259"/>
+                <a:ext cx="461554" cy="369332"/>
+              </a:xfrm>
+              <a:prstGeom prst="rect">
+                <a:avLst/>
+              </a:prstGeom>
+              <a:noFill/>
+            </p:spPr>
+            <p:txBody>
+              <a:bodyPr wrap="square" rtlCol="0">
+                <a:spAutoFit/>
+              </a:bodyPr>
+              <a:lstStyle/>
+              <a:p>
+                <a:pPr/>
+                <a14:m>
+                  <m:oMathPara xmlns:m="http://schemas.openxmlformats.org/officeDocument/2006/math">
+                    <m:oMathParaPr>
+                      <m:jc m:val="centerGroup"/>
+                    </m:oMathParaPr>
+                    <m:oMath xmlns:m="http://schemas.openxmlformats.org/officeDocument/2006/math">
+                      <m:r>
+                        <a:rPr kumimoji="1" lang="en-US" altLang="zh-CN" b="0" i="1" dirty="0" smtClean="0">
+                          <a:latin typeface="Cambria Math" panose="02040503050406030204" pitchFamily="18" charset="0"/>
+                        </a:rPr>
+                        <m:t>+</m:t>
+                      </m:r>
+                    </m:oMath>
+                  </m:oMathPara>
+                </a14:m>
+                <a:endParaRPr kumimoji="1" lang="zh-CN" altLang="en-US" dirty="0"/>
+              </a:p>
+            </p:txBody>
+          </p:sp>
+        </mc:Choice>
+        <mc:Fallback>
+          <p:sp>
+            <p:nvSpPr>
+              <p:cNvPr id="22" name="文本框 21">
+                <a:extLst>
+                  <a:ext uri="{FF2B5EF4-FFF2-40B4-BE49-F238E27FC236}">
+                    <a16:creationId xmlns:a16="http://schemas.microsoft.com/office/drawing/2014/main" id="{C488FAEE-CA1B-B2B7-8ECD-9806F0C6FEB9}"/>
+                  </a:ext>
+                </a:extLst>
+              </p:cNvPr>
+              <p:cNvSpPr txBox="1">
+                <a:spLocks noRot="1" noChangeAspect="1" noMove="1" noResize="1" noEditPoints="1" noAdjustHandles="1" noChangeArrowheads="1" noChangeShapeType="1" noTextEdit="1"/>
+              </p:cNvSpPr>
+              <p:nvPr/>
+            </p:nvSpPr>
+            <p:spPr>
+              <a:xfrm>
+                <a:off x="8769535" y="3183259"/>
+                <a:ext cx="461554" cy="369332"/>
+              </a:xfrm>
+              <a:prstGeom prst="rect">
+                <a:avLst/>
+              </a:prstGeom>
+              <a:blipFill>
+                <a:blip r:embed="rId14"/>
+                <a:stretch>
+                  <a:fillRect/>
+                </a:stretch>
+              </a:blipFill>
+            </p:spPr>
+            <p:txBody>
+              <a:bodyPr/>
+              <a:lstStyle/>
+              <a:p>
+                <a:r>
+                  <a:rPr lang="zh-CN" altLang="en-US">
+                    <a:noFill/>
+                  </a:rPr>
+                  <a:t> </a:t>
+                </a:r>
+              </a:p>
+            </p:txBody>
+          </p:sp>
+        </mc:Fallback>
+      </mc:AlternateContent>
+      <p:sp>
+        <p:nvSpPr>
+          <p:cNvPr id="24" name="矩形 23">
+            <a:extLst>
+              <a:ext uri="{FF2B5EF4-FFF2-40B4-BE49-F238E27FC236}">
+                <a16:creationId xmlns:a16="http://schemas.microsoft.com/office/drawing/2014/main" id="{B68AE24E-B825-8889-B5EB-2E6E6013BD5D}"/>
               </a:ext>
             </a:extLst>
           </p:cNvPr>
@@ -4187,7 +5349,7 @@
         </p:nvSpPr>
         <p:spPr>
           <a:xfrm>
-            <a:off x="557348" y="5260758"/>
+            <a:off x="6360530" y="3283017"/>
             <a:ext cx="748937" cy="169817"/>
           </a:xfrm>
           <a:prstGeom prst="rect">
@@ -4196,6 +5358,14 @@
           <a:solidFill>
             <a:srgbClr val="FFC000"/>
           </a:solidFill>
+          <a:ln>
+            <a:solidFill>
+              <a:schemeClr val="tx1">
+                <a:lumMod val="95000"/>
+                <a:lumOff val="5000"/>
+              </a:schemeClr>
+            </a:solidFill>
+          </a:ln>
         </p:spPr>
         <p:style>
           <a:lnRef idx="2">
@@ -4232,10 +5402,10 @@
         <mc:Choice xmlns:a14="http://schemas.microsoft.com/office/drawing/2010/main" Requires="a14">
           <p:sp>
             <p:nvSpPr>
-              <p:cNvPr id="29" name="文本框 28">
+              <p:cNvPr id="25" name="文本框 24">
                 <a:extLst>
                   <a:ext uri="{FF2B5EF4-FFF2-40B4-BE49-F238E27FC236}">
-                    <a16:creationId xmlns:a16="http://schemas.microsoft.com/office/drawing/2014/main" id="{B348E3E3-26A9-2156-8E49-50FAC649CBA3}"/>
+                    <a16:creationId xmlns:a16="http://schemas.microsoft.com/office/drawing/2014/main" id="{D3503A02-B243-C908-3412-8EDC88A8E147}"/>
                   </a:ext>
                 </a:extLst>
               </p:cNvPr>
@@ -4244,7 +5414,7 @@
             </p:nvSpPr>
             <p:spPr>
               <a:xfrm>
-                <a:off x="169816" y="5117455"/>
+                <a:off x="6496597" y="2855988"/>
                 <a:ext cx="461554" cy="369332"/>
               </a:xfrm>
               <a:prstGeom prst="rect">
@@ -4258,6 +5428,7 @@
               </a:bodyPr>
               <a:lstStyle/>
               <a:p>
+                <a:pPr/>
                 <a14:m>
                   <m:oMathPara xmlns:m="http://schemas.openxmlformats.org/officeDocument/2006/math">
                     <m:oMathParaPr>
@@ -4306,10 +5477,10 @@
         <mc:Fallback>
           <p:sp>
             <p:nvSpPr>
-              <p:cNvPr id="29" name="文本框 28">
+              <p:cNvPr id="25" name="文本框 24">
                 <a:extLst>
                   <a:ext uri="{FF2B5EF4-FFF2-40B4-BE49-F238E27FC236}">
-                    <a16:creationId xmlns:a16="http://schemas.microsoft.com/office/drawing/2014/main" id="{B348E3E3-26A9-2156-8E49-50FAC649CBA3}"/>
+                    <a16:creationId xmlns:a16="http://schemas.microsoft.com/office/drawing/2014/main" id="{D3503A02-B243-C908-3412-8EDC88A8E147}"/>
                   </a:ext>
                 </a:extLst>
               </p:cNvPr>
@@ -4320,16 +5491,16 @@
             </p:nvSpPr>
             <p:spPr>
               <a:xfrm>
-                <a:off x="169816" y="5117455"/>
+                <a:off x="6496597" y="2855988"/>
                 <a:ext cx="461554" cy="369332"/>
               </a:xfrm>
               <a:prstGeom prst="rect">
                 <a:avLst/>
               </a:prstGeom>
               <a:blipFill>
-                <a:blip r:embed="rId8"/>
+                <a:blip r:embed="rId15"/>
                 <a:stretch>
-                  <a:fillRect r="-2703" b="-12903"/>
+                  <a:fillRect r="-2703" b="-17241"/>
                 </a:stretch>
               </a:blipFill>
             </p:spPr>
@@ -4348,2125 +5519,979 @@
           </p:sp>
         </mc:Fallback>
       </mc:AlternateContent>
-      <p:grpSp>
-        <p:nvGrpSpPr>
-          <p:cNvPr id="53" name="组合 52">
-            <a:extLst>
-              <a:ext uri="{FF2B5EF4-FFF2-40B4-BE49-F238E27FC236}">
-                <a16:creationId xmlns:a16="http://schemas.microsoft.com/office/drawing/2014/main" id="{3FC013CA-1B2D-C26C-849B-6BE6A4D9D1C3}"/>
-              </a:ext>
-            </a:extLst>
-          </p:cNvPr>
-          <p:cNvGrpSpPr/>
-          <p:nvPr/>
-        </p:nvGrpSpPr>
-        <p:grpSpPr>
-          <a:xfrm>
-            <a:off x="5131529" y="1612259"/>
-            <a:ext cx="6250574" cy="3505196"/>
-            <a:chOff x="5453746" y="1150204"/>
-            <a:chExt cx="6250574" cy="3505196"/>
-          </a:xfrm>
-        </p:grpSpPr>
-        <mc:AlternateContent xmlns:mc="http://schemas.openxmlformats.org/markup-compatibility/2006">
-          <mc:Choice xmlns:a14="http://schemas.microsoft.com/office/drawing/2010/main" Requires="a14">
-            <p:sp>
-              <p:nvSpPr>
-                <p:cNvPr id="14" name="文本框 13">
-                  <a:extLst>
-                    <a:ext uri="{FF2B5EF4-FFF2-40B4-BE49-F238E27FC236}">
-                      <a16:creationId xmlns:a16="http://schemas.microsoft.com/office/drawing/2014/main" id="{0DF691CE-0B5F-51C4-E628-26345BB52116}"/>
-                    </a:ext>
-                  </a:extLst>
-                </p:cNvPr>
-                <p:cNvSpPr txBox="1"/>
-                <p:nvPr/>
-              </p:nvSpPr>
-              <p:spPr>
-                <a:xfrm>
-                  <a:off x="10785564" y="1847780"/>
-                  <a:ext cx="461554" cy="369332"/>
-                </a:xfrm>
-                <a:prstGeom prst="rect">
-                  <a:avLst/>
-                </a:prstGeom>
-                <a:noFill/>
-              </p:spPr>
-              <p:txBody>
-                <a:bodyPr wrap="square" rtlCol="0">
-                  <a:spAutoFit/>
-                </a:bodyPr>
-                <a:lstStyle/>
-                <a:p>
-                  <a14:m>
-                    <m:oMathPara xmlns:m="http://schemas.openxmlformats.org/officeDocument/2006/math">
-                      <m:oMathParaPr>
-                        <m:jc m:val="centerGroup"/>
-                      </m:oMathParaPr>
-                      <m:oMath xmlns:m="http://schemas.openxmlformats.org/officeDocument/2006/math">
-                        <m:sSub>
-                          <m:sSubPr>
-                            <m:ctrlPr>
-                              <a:rPr kumimoji="1" lang="en-US" altLang="zh-CN" b="0" i="1" dirty="0" smtClean="0">
-                                <a:latin typeface="Cambria Math" panose="02040503050406030204" pitchFamily="18" charset="0"/>
-                              </a:rPr>
-                            </m:ctrlPr>
-                          </m:sSubPr>
-                          <m:e>
-                            <m:r>
-                              <a:rPr kumimoji="1" lang="en-US" altLang="zh-CN" b="0" i="1" dirty="0" smtClean="0">
-                                <a:latin typeface="Cambria Math" panose="02040503050406030204" pitchFamily="18" charset="0"/>
-                              </a:rPr>
-                              <m:t>𝑣</m:t>
-                            </m:r>
-                          </m:e>
-                          <m:sub>
-                            <m:r>
-                              <a:rPr kumimoji="1" lang="en-US" altLang="zh-CN" b="0" i="1" dirty="0" smtClean="0">
-                                <a:latin typeface="Cambria Math" panose="02040503050406030204" pitchFamily="18" charset="0"/>
-                              </a:rPr>
-                              <m:t>𝑖</m:t>
-                            </m:r>
-                          </m:sub>
-                        </m:sSub>
-                        <m:r>
-                          <a:rPr kumimoji="1" lang="zh-CN" altLang="en-US" i="1" dirty="0" smtClean="0">
-                            <a:latin typeface="Cambria Math" panose="02040503050406030204" pitchFamily="18" charset="0"/>
-                          </a:rPr>
-                          <m:t> </m:t>
-                        </m:r>
-                      </m:oMath>
-                    </m:oMathPara>
-                  </a14:m>
-                  <a:endParaRPr kumimoji="1" lang="zh-CN" altLang="en-US" dirty="0"/>
-                </a:p>
-              </p:txBody>
-            </p:sp>
-          </mc:Choice>
-          <mc:Fallback>
-            <p:sp>
-              <p:nvSpPr>
-                <p:cNvPr id="14" name="文本框 13">
-                  <a:extLst>
-                    <a:ext uri="{FF2B5EF4-FFF2-40B4-BE49-F238E27FC236}">
-                      <a16:creationId xmlns:a16="http://schemas.microsoft.com/office/drawing/2014/main" id="{0DF691CE-0B5F-51C4-E628-26345BB52116}"/>
-                    </a:ext>
-                  </a:extLst>
-                </p:cNvPr>
-                <p:cNvSpPr txBox="1">
-                  <a:spLocks noRot="1" noChangeAspect="1" noMove="1" noResize="1" noEditPoints="1" noAdjustHandles="1" noChangeArrowheads="1" noChangeShapeType="1" noTextEdit="1"/>
-                </p:cNvSpPr>
-                <p:nvPr/>
-              </p:nvSpPr>
-              <p:spPr>
-                <a:xfrm>
-                  <a:off x="10785564" y="1847780"/>
-                  <a:ext cx="461554" cy="369332"/>
-                </a:xfrm>
-                <a:prstGeom prst="rect">
-                  <a:avLst/>
-                </a:prstGeom>
-                <a:blipFill>
-                  <a:blip r:embed="rId9"/>
-                  <a:stretch>
-                    <a:fillRect r="-2632" b="-16667"/>
-                  </a:stretch>
-                </a:blipFill>
-              </p:spPr>
-              <p:txBody>
-                <a:bodyPr/>
-                <a:lstStyle/>
-                <a:p>
-                  <a:r>
-                    <a:rPr lang="zh-CN" altLang="en-US">
-                      <a:noFill/>
-                    </a:rPr>
-                    <a:t> </a:t>
-                  </a:r>
-                </a:p>
-              </p:txBody>
-            </p:sp>
-          </mc:Fallback>
-        </mc:AlternateContent>
-        <p:sp>
-          <p:nvSpPr>
-            <p:cNvPr id="9" name="矩形 8">
-              <a:extLst>
-                <a:ext uri="{FF2B5EF4-FFF2-40B4-BE49-F238E27FC236}">
-                  <a16:creationId xmlns:a16="http://schemas.microsoft.com/office/drawing/2014/main" id="{764AA410-DF38-B4F3-1AE0-3134786A3039}"/>
-                </a:ext>
-              </a:extLst>
-            </p:cNvPr>
-            <p:cNvSpPr/>
-            <p:nvPr/>
-          </p:nvSpPr>
-          <p:spPr>
-            <a:xfrm>
-              <a:off x="10641874" y="2200477"/>
-              <a:ext cx="748937" cy="169817"/>
-            </a:xfrm>
-            <a:prstGeom prst="rect">
-              <a:avLst/>
-            </a:prstGeom>
-            <a:solidFill>
-              <a:schemeClr val="accent5">
-                <a:lumMod val="20000"/>
-                <a:lumOff val="80000"/>
-              </a:schemeClr>
-            </a:solidFill>
-            <a:ln>
-              <a:solidFill>
-                <a:schemeClr val="tx1">
-                  <a:lumMod val="95000"/>
-                  <a:lumOff val="5000"/>
-                </a:schemeClr>
-              </a:solidFill>
-            </a:ln>
-          </p:spPr>
-          <p:style>
-            <a:lnRef idx="2">
-              <a:schemeClr val="accent1">
-                <a:shade val="15000"/>
-              </a:schemeClr>
-            </a:lnRef>
-            <a:fillRef idx="1">
-              <a:schemeClr val="accent1"/>
-            </a:fillRef>
-            <a:effectRef idx="0">
-              <a:schemeClr val="accent1"/>
-            </a:effectRef>
-            <a:fontRef idx="minor">
-              <a:schemeClr val="lt1"/>
-            </a:fontRef>
-          </p:style>
-          <p:txBody>
-            <a:bodyPr rtlCol="0" anchor="ctr"/>
-            <a:lstStyle/>
-            <a:p>
-              <a:pPr algn="ctr"/>
-              <a:endParaRPr kumimoji="1" lang="zh-CN" altLang="en-US" dirty="0">
-                <a:solidFill>
-                  <a:schemeClr val="tx1"/>
-                </a:solidFill>
-                <a:latin typeface="Calibri" panose="020F0502020204030204" pitchFamily="34" charset="0"/>
-                <a:cs typeface="Calibri" panose="020F0502020204030204" pitchFamily="34" charset="0"/>
-              </a:endParaRPr>
-            </a:p>
-          </p:txBody>
-        </p:sp>
-        <p:sp>
-          <p:nvSpPr>
-            <p:cNvPr id="11" name="矩形 10">
-              <a:extLst>
-                <a:ext uri="{FF2B5EF4-FFF2-40B4-BE49-F238E27FC236}">
-                  <a16:creationId xmlns:a16="http://schemas.microsoft.com/office/drawing/2014/main" id="{EB57AF90-EC28-B331-3811-E14D83C2D0C6}"/>
-                </a:ext>
-              </a:extLst>
-            </p:cNvPr>
-            <p:cNvSpPr/>
-            <p:nvPr/>
-          </p:nvSpPr>
-          <p:spPr>
-            <a:xfrm>
-              <a:off x="10319658" y="2531401"/>
-              <a:ext cx="169817" cy="748938"/>
-            </a:xfrm>
-            <a:prstGeom prst="rect">
-              <a:avLst/>
-            </a:prstGeom>
-            <a:solidFill>
-              <a:schemeClr val="accent4">
-                <a:lumMod val="20000"/>
-                <a:lumOff val="80000"/>
-              </a:schemeClr>
-            </a:solidFill>
-            <a:ln>
-              <a:solidFill>
-                <a:schemeClr val="tx1">
-                  <a:lumMod val="95000"/>
-                  <a:lumOff val="5000"/>
-                </a:schemeClr>
-              </a:solidFill>
-            </a:ln>
-          </p:spPr>
-          <p:style>
-            <a:lnRef idx="2">
-              <a:schemeClr val="accent1">
-                <a:shade val="15000"/>
-              </a:schemeClr>
-            </a:lnRef>
-            <a:fillRef idx="1">
-              <a:schemeClr val="accent1"/>
-            </a:fillRef>
-            <a:effectRef idx="0">
-              <a:schemeClr val="accent1"/>
-            </a:effectRef>
-            <a:fontRef idx="minor">
-              <a:schemeClr val="lt1"/>
-            </a:fontRef>
-          </p:style>
-          <p:txBody>
-            <a:bodyPr rtlCol="0" anchor="ctr"/>
-            <a:lstStyle/>
-            <a:p>
-              <a:pPr algn="ctr"/>
-              <a:endParaRPr kumimoji="1" lang="zh-CN" altLang="en-US" dirty="0">
-                <a:solidFill>
-                  <a:schemeClr val="tx1"/>
-                </a:solidFill>
-                <a:latin typeface="Calibri" panose="020F0502020204030204" pitchFamily="34" charset="0"/>
-                <a:cs typeface="Calibri" panose="020F0502020204030204" pitchFamily="34" charset="0"/>
-              </a:endParaRPr>
-            </a:p>
-          </p:txBody>
-        </p:sp>
-        <mc:AlternateContent xmlns:mc="http://schemas.openxmlformats.org/markup-compatibility/2006">
-          <mc:Choice xmlns:a14="http://schemas.microsoft.com/office/drawing/2010/main" Requires="a14">
-            <p:sp>
-              <p:nvSpPr>
-                <p:cNvPr id="12" name="矩形 11">
-                  <a:extLst>
-                    <a:ext uri="{FF2B5EF4-FFF2-40B4-BE49-F238E27FC236}">
-                      <a16:creationId xmlns:a16="http://schemas.microsoft.com/office/drawing/2014/main" id="{1CFF896B-4C3B-27C0-E344-6C5C2CF3E3E8}"/>
-                    </a:ext>
-                  </a:extLst>
-                </p:cNvPr>
-                <p:cNvSpPr/>
-                <p:nvPr/>
-              </p:nvSpPr>
-              <p:spPr>
-                <a:xfrm>
-                  <a:off x="10641873" y="2531401"/>
-                  <a:ext cx="748937" cy="748938"/>
-                </a:xfrm>
-                <a:prstGeom prst="rect">
-                  <a:avLst/>
-                </a:prstGeom>
-                <a:solidFill>
-                  <a:schemeClr val="accent2">
-                    <a:lumMod val="20000"/>
-                    <a:lumOff val="80000"/>
-                  </a:schemeClr>
-                </a:solidFill>
-                <a:ln>
-                  <a:solidFill>
-                    <a:schemeClr val="tx1">
-                      <a:lumMod val="95000"/>
-                      <a:lumOff val="5000"/>
-                    </a:schemeClr>
-                  </a:solidFill>
-                </a:ln>
-              </p:spPr>
-              <p:style>
-                <a:lnRef idx="2">
-                  <a:schemeClr val="accent1">
-                    <a:shade val="15000"/>
-                  </a:schemeClr>
-                </a:lnRef>
-                <a:fillRef idx="1">
-                  <a:schemeClr val="accent1"/>
-                </a:fillRef>
-                <a:effectRef idx="0">
-                  <a:schemeClr val="accent1"/>
-                </a:effectRef>
-                <a:fontRef idx="minor">
-                  <a:schemeClr val="lt1"/>
-                </a:fontRef>
-              </p:style>
-              <p:txBody>
-                <a:bodyPr rtlCol="0" anchor="ctr"/>
-                <a:lstStyle/>
-                <a:p>
-                  <a:pPr algn="ctr"/>
-                  <a14:m>
-                    <m:oMathPara xmlns:m="http://schemas.openxmlformats.org/officeDocument/2006/math">
-                      <m:oMathParaPr>
-                        <m:jc m:val="centerGroup"/>
-                      </m:oMathParaPr>
-                      <m:oMath xmlns:m="http://schemas.openxmlformats.org/officeDocument/2006/math">
-                        <m:sSub>
-                          <m:sSubPr>
-                            <m:ctrlPr>
-                              <a:rPr kumimoji="1" lang="en-US" altLang="zh-CN" sz="2000" b="0" i="1" smtClean="0">
-                                <a:solidFill>
-                                  <a:schemeClr val="tx1"/>
-                                </a:solidFill>
-                                <a:latin typeface="Cambria Math" panose="02040503050406030204" pitchFamily="18" charset="0"/>
-                                <a:cs typeface="Calibri" panose="020F0502020204030204" pitchFamily="34" charset="0"/>
-                              </a:rPr>
-                            </m:ctrlPr>
-                          </m:sSubPr>
-                          <m:e>
-                            <m:r>
-                              <a:rPr kumimoji="1" lang="en-US" altLang="zh-CN" sz="2000" b="0" i="1" smtClean="0">
-                                <a:solidFill>
-                                  <a:schemeClr val="tx1"/>
-                                </a:solidFill>
-                                <a:latin typeface="Cambria Math" panose="02040503050406030204" pitchFamily="18" charset="0"/>
-                                <a:cs typeface="Calibri" panose="020F0502020204030204" pitchFamily="34" charset="0"/>
-                              </a:rPr>
-                              <m:t>𝑠</m:t>
-                            </m:r>
-                          </m:e>
-                          <m:sub>
-                            <m:r>
-                              <a:rPr kumimoji="1" lang="en-US" altLang="zh-CN" sz="2000" b="0" i="1" smtClean="0">
-                                <a:solidFill>
-                                  <a:schemeClr val="tx1"/>
-                                </a:solidFill>
-                                <a:latin typeface="Cambria Math" panose="02040503050406030204" pitchFamily="18" charset="0"/>
-                                <a:cs typeface="Calibri" panose="020F0502020204030204" pitchFamily="34" charset="0"/>
-                              </a:rPr>
-                              <m:t>𝑡</m:t>
-                            </m:r>
-                          </m:sub>
-                        </m:sSub>
-                      </m:oMath>
-                    </m:oMathPara>
-                  </a14:m>
-                  <a:endParaRPr kumimoji="1" lang="zh-CN" altLang="en-US" sz="2000" dirty="0">
-                    <a:solidFill>
-                      <a:schemeClr val="tx1"/>
-                    </a:solidFill>
-                    <a:latin typeface="Calibri" panose="020F0502020204030204" pitchFamily="34" charset="0"/>
-                    <a:cs typeface="Calibri" panose="020F0502020204030204" pitchFamily="34" charset="0"/>
-                  </a:endParaRPr>
-                </a:p>
-              </p:txBody>
-            </p:sp>
-          </mc:Choice>
-          <mc:Fallback>
-            <p:sp>
-              <p:nvSpPr>
-                <p:cNvPr id="12" name="矩形 11">
-                  <a:extLst>
-                    <a:ext uri="{FF2B5EF4-FFF2-40B4-BE49-F238E27FC236}">
-                      <a16:creationId xmlns:a16="http://schemas.microsoft.com/office/drawing/2014/main" id="{1CFF896B-4C3B-27C0-E344-6C5C2CF3E3E8}"/>
-                    </a:ext>
-                  </a:extLst>
-                </p:cNvPr>
-                <p:cNvSpPr>
-                  <a:spLocks noRot="1" noChangeAspect="1" noMove="1" noResize="1" noEditPoints="1" noAdjustHandles="1" noChangeArrowheads="1" noChangeShapeType="1" noTextEdit="1"/>
-                </p:cNvSpPr>
-                <p:nvPr/>
-              </p:nvSpPr>
-              <p:spPr>
-                <a:xfrm>
-                  <a:off x="10641873" y="2531401"/>
-                  <a:ext cx="748937" cy="748938"/>
-                </a:xfrm>
-                <a:prstGeom prst="rect">
-                  <a:avLst/>
-                </a:prstGeom>
-                <a:blipFill>
-                  <a:blip r:embed="rId10"/>
-                  <a:stretch>
-                    <a:fillRect/>
-                  </a:stretch>
-                </a:blipFill>
-                <a:ln>
-                  <a:solidFill>
-                    <a:schemeClr val="tx1">
-                      <a:lumMod val="95000"/>
-                      <a:lumOff val="5000"/>
-                    </a:schemeClr>
-                  </a:solidFill>
-                </a:ln>
-              </p:spPr>
-              <p:txBody>
-                <a:bodyPr/>
-                <a:lstStyle/>
-                <a:p>
-                  <a:r>
-                    <a:rPr lang="zh-CN" altLang="en-US">
-                      <a:noFill/>
-                    </a:rPr>
-                    <a:t> </a:t>
-                  </a:r>
-                </a:p>
-              </p:txBody>
-            </p:sp>
-          </mc:Fallback>
-        </mc:AlternateContent>
-        <mc:AlternateContent xmlns:mc="http://schemas.openxmlformats.org/markup-compatibility/2006">
-          <mc:Choice xmlns:a14="http://schemas.microsoft.com/office/drawing/2010/main" Requires="a14">
-            <p:sp>
-              <p:nvSpPr>
-                <p:cNvPr id="13" name="文本框 12">
-                  <a:extLst>
-                    <a:ext uri="{FF2B5EF4-FFF2-40B4-BE49-F238E27FC236}">
-                      <a16:creationId xmlns:a16="http://schemas.microsoft.com/office/drawing/2014/main" id="{D07FE843-B492-E66F-06A9-DA2856D3E6C1}"/>
-                    </a:ext>
-                  </a:extLst>
-                </p:cNvPr>
-                <p:cNvSpPr txBox="1"/>
-                <p:nvPr/>
-              </p:nvSpPr>
-              <p:spPr>
-                <a:xfrm>
-                  <a:off x="9966964" y="2721204"/>
-                  <a:ext cx="461554" cy="369332"/>
-                </a:xfrm>
-                <a:prstGeom prst="rect">
-                  <a:avLst/>
-                </a:prstGeom>
-                <a:noFill/>
-              </p:spPr>
-              <p:txBody>
-                <a:bodyPr wrap="square" rtlCol="0">
-                  <a:spAutoFit/>
-                </a:bodyPr>
-                <a:lstStyle/>
-                <a:p>
-                  <a14:m>
-                    <m:oMathPara xmlns:m="http://schemas.openxmlformats.org/officeDocument/2006/math">
-                      <m:oMathParaPr>
-                        <m:jc m:val="centerGroup"/>
-                      </m:oMathParaPr>
-                      <m:oMath xmlns:m="http://schemas.openxmlformats.org/officeDocument/2006/math">
-                        <m:sSub>
-                          <m:sSubPr>
-                            <m:ctrlPr>
-                              <a:rPr kumimoji="1" lang="en-US" altLang="zh-CN" b="0" i="1" dirty="0" smtClean="0">
-                                <a:latin typeface="Cambria Math" panose="02040503050406030204" pitchFamily="18" charset="0"/>
-                              </a:rPr>
-                            </m:ctrlPr>
-                          </m:sSubPr>
-                          <m:e>
-                            <m:r>
-                              <a:rPr kumimoji="1" lang="en-US" altLang="zh-CN" b="0" i="1" dirty="0" smtClean="0">
-                                <a:latin typeface="Cambria Math" panose="02040503050406030204" pitchFamily="18" charset="0"/>
-                              </a:rPr>
-                              <m:t>𝑘</m:t>
-                            </m:r>
-                          </m:e>
-                          <m:sub>
-                            <m:r>
-                              <a:rPr kumimoji="1" lang="en-US" altLang="zh-CN" b="0" i="1" dirty="0" smtClean="0">
-                                <a:latin typeface="Cambria Math" panose="02040503050406030204" pitchFamily="18" charset="0"/>
-                              </a:rPr>
-                              <m:t>𝑖</m:t>
-                            </m:r>
-                          </m:sub>
-                        </m:sSub>
-                        <m:r>
-                          <a:rPr kumimoji="1" lang="zh-CN" altLang="en-US" i="1" dirty="0" smtClean="0">
-                            <a:latin typeface="Cambria Math" panose="02040503050406030204" pitchFamily="18" charset="0"/>
-                          </a:rPr>
-                          <m:t> </m:t>
-                        </m:r>
-                      </m:oMath>
-                    </m:oMathPara>
-                  </a14:m>
-                  <a:endParaRPr kumimoji="1" lang="zh-CN" altLang="en-US" dirty="0"/>
-                </a:p>
-              </p:txBody>
-            </p:sp>
-          </mc:Choice>
-          <mc:Fallback>
-            <p:sp>
-              <p:nvSpPr>
-                <p:cNvPr id="13" name="文本框 12">
-                  <a:extLst>
-                    <a:ext uri="{FF2B5EF4-FFF2-40B4-BE49-F238E27FC236}">
-                      <a16:creationId xmlns:a16="http://schemas.microsoft.com/office/drawing/2014/main" id="{D07FE843-B492-E66F-06A9-DA2856D3E6C1}"/>
-                    </a:ext>
-                  </a:extLst>
-                </p:cNvPr>
-                <p:cNvSpPr txBox="1">
-                  <a:spLocks noRot="1" noChangeAspect="1" noMove="1" noResize="1" noEditPoints="1" noAdjustHandles="1" noChangeArrowheads="1" noChangeShapeType="1" noTextEdit="1"/>
-                </p:cNvSpPr>
-                <p:nvPr/>
-              </p:nvSpPr>
-              <p:spPr>
-                <a:xfrm>
-                  <a:off x="9966964" y="2721204"/>
-                  <a:ext cx="461554" cy="369332"/>
-                </a:xfrm>
-                <a:prstGeom prst="rect">
-                  <a:avLst/>
-                </a:prstGeom>
-                <a:blipFill>
-                  <a:blip r:embed="rId11"/>
-                  <a:stretch>
-                    <a:fillRect r="-2703" b="-16667"/>
-                  </a:stretch>
-                </a:blipFill>
-              </p:spPr>
-              <p:txBody>
-                <a:bodyPr/>
-                <a:lstStyle/>
-                <a:p>
-                  <a:r>
-                    <a:rPr lang="zh-CN" altLang="en-US">
-                      <a:noFill/>
-                    </a:rPr>
-                    <a:t> </a:t>
-                  </a:r>
-                </a:p>
-              </p:txBody>
-            </p:sp>
-          </mc:Fallback>
-        </mc:AlternateContent>
-        <mc:AlternateContent xmlns:mc="http://schemas.openxmlformats.org/markup-compatibility/2006">
-          <mc:Choice xmlns:a14="http://schemas.microsoft.com/office/drawing/2010/main" Requires="a14">
-            <p:sp>
-              <p:nvSpPr>
-                <p:cNvPr id="15" name="矩形 14">
-                  <a:extLst>
-                    <a:ext uri="{FF2B5EF4-FFF2-40B4-BE49-F238E27FC236}">
-                      <a16:creationId xmlns:a16="http://schemas.microsoft.com/office/drawing/2014/main" id="{0C27CBBF-4B23-7C60-012D-25F0119F35AB}"/>
-                    </a:ext>
-                  </a:extLst>
-                </p:cNvPr>
-                <p:cNvSpPr/>
-                <p:nvPr/>
-              </p:nvSpPr>
-              <p:spPr>
-                <a:xfrm>
-                  <a:off x="8893634" y="2531401"/>
-                  <a:ext cx="748937" cy="748938"/>
-                </a:xfrm>
-                <a:prstGeom prst="rect">
-                  <a:avLst/>
-                </a:prstGeom>
-                <a:solidFill>
-                  <a:schemeClr val="accent6">
-                    <a:lumMod val="20000"/>
-                    <a:lumOff val="80000"/>
-                  </a:schemeClr>
-                </a:solidFill>
-                <a:ln>
-                  <a:solidFill>
-                    <a:schemeClr val="tx1">
-                      <a:lumMod val="95000"/>
-                      <a:lumOff val="5000"/>
-                    </a:schemeClr>
-                  </a:solidFill>
-                </a:ln>
-              </p:spPr>
-              <p:style>
-                <a:lnRef idx="2">
-                  <a:schemeClr val="accent1">
-                    <a:shade val="15000"/>
-                  </a:schemeClr>
-                </a:lnRef>
-                <a:fillRef idx="1">
-                  <a:schemeClr val="accent1"/>
-                </a:fillRef>
-                <a:effectRef idx="0">
-                  <a:schemeClr val="accent1"/>
-                </a:effectRef>
-                <a:fontRef idx="minor">
-                  <a:schemeClr val="lt1"/>
-                </a:fontRef>
-              </p:style>
-              <p:txBody>
-                <a:bodyPr rtlCol="0" anchor="ctr"/>
-                <a:lstStyle/>
-                <a:p>
-                  <a:pPr algn="ctr"/>
-                  <a14:m>
-                    <m:oMathPara xmlns:m="http://schemas.openxmlformats.org/officeDocument/2006/math">
-                      <m:oMathParaPr>
-                        <m:jc m:val="centerGroup"/>
-                      </m:oMathParaPr>
-                      <m:oMath xmlns:m="http://schemas.openxmlformats.org/officeDocument/2006/math">
-                        <m:sSub>
-                          <m:sSubPr>
-                            <m:ctrlPr>
-                              <a:rPr kumimoji="1" lang="en-US" altLang="zh-CN" sz="2000" b="0" i="1" smtClean="0">
-                                <a:solidFill>
-                                  <a:schemeClr val="tx1"/>
-                                </a:solidFill>
-                                <a:latin typeface="Cambria Math" panose="02040503050406030204" pitchFamily="18" charset="0"/>
-                                <a:cs typeface="Calibri" panose="020F0502020204030204" pitchFamily="34" charset="0"/>
-                              </a:rPr>
-                            </m:ctrlPr>
-                          </m:sSubPr>
-                          <m:e>
-                            <m:r>
-                              <a:rPr kumimoji="1" lang="en-US" altLang="zh-CN" sz="2000" b="0" i="1" smtClean="0">
-                                <a:solidFill>
-                                  <a:schemeClr val="tx1"/>
-                                </a:solidFill>
-                                <a:latin typeface="Cambria Math" panose="02040503050406030204" pitchFamily="18" charset="0"/>
-                                <a:cs typeface="Calibri" panose="020F0502020204030204" pitchFamily="34" charset="0"/>
-                              </a:rPr>
-                              <m:t>h</m:t>
-                            </m:r>
-                          </m:e>
-                          <m:sub>
-                            <m:r>
-                              <a:rPr kumimoji="1" lang="en-US" altLang="zh-CN" sz="2000" b="0" i="1" smtClean="0">
-                                <a:solidFill>
-                                  <a:schemeClr val="tx1"/>
-                                </a:solidFill>
-                                <a:latin typeface="Cambria Math" panose="02040503050406030204" pitchFamily="18" charset="0"/>
-                                <a:cs typeface="Calibri" panose="020F0502020204030204" pitchFamily="34" charset="0"/>
-                              </a:rPr>
-                              <m:t>𝑖</m:t>
-                            </m:r>
-                            <m:r>
-                              <a:rPr kumimoji="1" lang="en-US" altLang="zh-CN" sz="2000" b="0" i="1" smtClean="0">
-                                <a:solidFill>
-                                  <a:schemeClr val="tx1"/>
-                                </a:solidFill>
-                                <a:latin typeface="Cambria Math" panose="02040503050406030204" pitchFamily="18" charset="0"/>
-                                <a:cs typeface="Calibri" panose="020F0502020204030204" pitchFamily="34" charset="0"/>
-                              </a:rPr>
-                              <m:t>−1</m:t>
-                            </m:r>
-                          </m:sub>
-                        </m:sSub>
-                      </m:oMath>
-                    </m:oMathPara>
-                  </a14:m>
-                  <a:endParaRPr kumimoji="1" lang="zh-CN" altLang="en-US" sz="2000" dirty="0">
-                    <a:solidFill>
-                      <a:schemeClr val="tx1"/>
-                    </a:solidFill>
-                    <a:latin typeface="Calibri" panose="020F0502020204030204" pitchFamily="34" charset="0"/>
-                    <a:cs typeface="Calibri" panose="020F0502020204030204" pitchFamily="34" charset="0"/>
-                  </a:endParaRPr>
-                </a:p>
-              </p:txBody>
-            </p:sp>
-          </mc:Choice>
-          <mc:Fallback>
-            <p:sp>
-              <p:nvSpPr>
-                <p:cNvPr id="15" name="矩形 14">
-                  <a:extLst>
-                    <a:ext uri="{FF2B5EF4-FFF2-40B4-BE49-F238E27FC236}">
-                      <a16:creationId xmlns:a16="http://schemas.microsoft.com/office/drawing/2014/main" id="{0C27CBBF-4B23-7C60-012D-25F0119F35AB}"/>
-                    </a:ext>
-                  </a:extLst>
-                </p:cNvPr>
-                <p:cNvSpPr>
-                  <a:spLocks noRot="1" noChangeAspect="1" noMove="1" noResize="1" noEditPoints="1" noAdjustHandles="1" noChangeArrowheads="1" noChangeShapeType="1" noTextEdit="1"/>
-                </p:cNvSpPr>
-                <p:nvPr/>
-              </p:nvSpPr>
-              <p:spPr>
-                <a:xfrm>
-                  <a:off x="8893634" y="2531401"/>
-                  <a:ext cx="748937" cy="748938"/>
-                </a:xfrm>
-                <a:prstGeom prst="rect">
-                  <a:avLst/>
-                </a:prstGeom>
-                <a:blipFill>
-                  <a:blip r:embed="rId12"/>
-                  <a:stretch>
-                    <a:fillRect/>
-                  </a:stretch>
-                </a:blipFill>
-                <a:ln>
-                  <a:solidFill>
-                    <a:schemeClr val="tx1">
-                      <a:lumMod val="95000"/>
-                      <a:lumOff val="5000"/>
-                    </a:schemeClr>
-                  </a:solidFill>
-                </a:ln>
-              </p:spPr>
-              <p:txBody>
-                <a:bodyPr/>
-                <a:lstStyle/>
-                <a:p>
-                  <a:r>
-                    <a:rPr lang="zh-CN" altLang="en-US">
-                      <a:noFill/>
-                    </a:rPr>
-                    <a:t> </a:t>
-                  </a:r>
-                </a:p>
-              </p:txBody>
-            </p:sp>
-          </mc:Fallback>
-        </mc:AlternateContent>
-        <mc:AlternateContent xmlns:mc="http://schemas.openxmlformats.org/markup-compatibility/2006">
-          <mc:Choice xmlns:a14="http://schemas.microsoft.com/office/drawing/2010/main" Requires="a14">
-            <p:sp>
-              <p:nvSpPr>
-                <p:cNvPr id="20" name="矩形 19">
-                  <a:extLst>
-                    <a:ext uri="{FF2B5EF4-FFF2-40B4-BE49-F238E27FC236}">
-                      <a16:creationId xmlns:a16="http://schemas.microsoft.com/office/drawing/2014/main" id="{55902FB2-3A15-FE5C-0EA1-BA7FA8493466}"/>
-                    </a:ext>
-                  </a:extLst>
-                </p:cNvPr>
-                <p:cNvSpPr/>
-                <p:nvPr/>
-              </p:nvSpPr>
-              <p:spPr>
-                <a:xfrm>
-                  <a:off x="7982500" y="2531401"/>
-                  <a:ext cx="748937" cy="748938"/>
-                </a:xfrm>
-                <a:prstGeom prst="rect">
-                  <a:avLst/>
-                </a:prstGeom>
-                <a:solidFill>
-                  <a:schemeClr val="bg1">
-                    <a:lumMod val="95000"/>
-                  </a:schemeClr>
-                </a:solidFill>
-                <a:ln>
-                  <a:solidFill>
-                    <a:schemeClr val="tx1">
-                      <a:lumMod val="95000"/>
-                      <a:lumOff val="5000"/>
-                    </a:schemeClr>
-                  </a:solidFill>
-                </a:ln>
-              </p:spPr>
-              <p:style>
-                <a:lnRef idx="2">
-                  <a:schemeClr val="accent1">
-                    <a:shade val="15000"/>
-                  </a:schemeClr>
-                </a:lnRef>
-                <a:fillRef idx="1">
-                  <a:schemeClr val="accent1"/>
-                </a:fillRef>
-                <a:effectRef idx="0">
-                  <a:schemeClr val="accent1"/>
-                </a:effectRef>
-                <a:fontRef idx="minor">
-                  <a:schemeClr val="lt1"/>
-                </a:fontRef>
-              </p:style>
-              <p:txBody>
-                <a:bodyPr rtlCol="0" anchor="ctr"/>
-                <a:lstStyle/>
-                <a:p>
-                  <a:pPr algn="ctr"/>
-                  <a14:m>
-                    <m:oMathPara xmlns:m="http://schemas.openxmlformats.org/officeDocument/2006/math">
-                      <m:oMathParaPr>
-                        <m:jc m:val="centerGroup"/>
-                      </m:oMathParaPr>
-                      <m:oMath xmlns:m="http://schemas.openxmlformats.org/officeDocument/2006/math">
-                        <m:r>
-                          <a:rPr kumimoji="1" lang="en-US" altLang="zh-CN" sz="2000" b="0" i="1" smtClean="0">
-                            <a:solidFill>
-                              <a:schemeClr val="tx1"/>
-                            </a:solidFill>
-                            <a:latin typeface="Cambria Math" panose="02040503050406030204" pitchFamily="18" charset="0"/>
-                            <a:cs typeface="Calibri" panose="020F0502020204030204" pitchFamily="34" charset="0"/>
-                          </a:rPr>
-                          <m:t>𝑔</m:t>
-                        </m:r>
-                        <m:sSub>
-                          <m:sSubPr>
-                            <m:ctrlPr>
-                              <a:rPr kumimoji="1" lang="en-US" altLang="zh-CN" sz="2000" b="0" i="1" smtClean="0">
-                                <a:solidFill>
-                                  <a:schemeClr val="tx1"/>
-                                </a:solidFill>
-                                <a:latin typeface="Cambria Math" panose="02040503050406030204" pitchFamily="18" charset="0"/>
-                                <a:cs typeface="Calibri" panose="020F0502020204030204" pitchFamily="34" charset="0"/>
-                              </a:rPr>
-                            </m:ctrlPr>
-                          </m:sSubPr>
-                          <m:e>
-                            <m:r>
-                              <a:rPr kumimoji="1" lang="en-US" altLang="zh-CN" sz="2000" b="0" i="1" smtClean="0">
-                                <a:solidFill>
-                                  <a:schemeClr val="tx1"/>
-                                </a:solidFill>
-                                <a:latin typeface="Cambria Math" panose="02040503050406030204" pitchFamily="18" charset="0"/>
-                                <a:cs typeface="Calibri" panose="020F0502020204030204" pitchFamily="34" charset="0"/>
-                              </a:rPr>
-                              <m:t>𝑘</m:t>
-                            </m:r>
-                          </m:e>
-                          <m:sub>
-                            <m:r>
-                              <a:rPr kumimoji="1" lang="en-US" altLang="zh-CN" sz="2000" b="0" i="1" smtClean="0">
-                                <a:solidFill>
-                                  <a:schemeClr val="tx1"/>
-                                </a:solidFill>
-                                <a:latin typeface="Cambria Math" panose="02040503050406030204" pitchFamily="18" charset="0"/>
-                                <a:cs typeface="Calibri" panose="020F0502020204030204" pitchFamily="34" charset="0"/>
-                              </a:rPr>
-                              <m:t>𝑖</m:t>
-                            </m:r>
-                          </m:sub>
-                        </m:sSub>
-                      </m:oMath>
-                    </m:oMathPara>
-                  </a14:m>
-                  <a:endParaRPr kumimoji="1" lang="zh-CN" altLang="en-US" sz="2000" dirty="0">
-                    <a:solidFill>
-                      <a:schemeClr val="tx1"/>
-                    </a:solidFill>
-                    <a:latin typeface="Calibri" panose="020F0502020204030204" pitchFamily="34" charset="0"/>
-                    <a:cs typeface="Calibri" panose="020F0502020204030204" pitchFamily="34" charset="0"/>
-                  </a:endParaRPr>
-                </a:p>
-              </p:txBody>
-            </p:sp>
-          </mc:Choice>
-          <mc:Fallback>
-            <p:sp>
-              <p:nvSpPr>
-                <p:cNvPr id="20" name="矩形 19">
-                  <a:extLst>
-                    <a:ext uri="{FF2B5EF4-FFF2-40B4-BE49-F238E27FC236}">
-                      <a16:creationId xmlns:a16="http://schemas.microsoft.com/office/drawing/2014/main" id="{55902FB2-3A15-FE5C-0EA1-BA7FA8493466}"/>
-                    </a:ext>
-                  </a:extLst>
-                </p:cNvPr>
-                <p:cNvSpPr>
-                  <a:spLocks noRot="1" noChangeAspect="1" noMove="1" noResize="1" noEditPoints="1" noAdjustHandles="1" noChangeArrowheads="1" noChangeShapeType="1" noTextEdit="1"/>
-                </p:cNvSpPr>
-                <p:nvPr/>
-              </p:nvSpPr>
-              <p:spPr>
-                <a:xfrm>
-                  <a:off x="7982500" y="2531401"/>
-                  <a:ext cx="748937" cy="748938"/>
-                </a:xfrm>
-                <a:prstGeom prst="rect">
-                  <a:avLst/>
-                </a:prstGeom>
-                <a:blipFill>
-                  <a:blip r:embed="rId13"/>
-                  <a:stretch>
-                    <a:fillRect/>
-                  </a:stretch>
-                </a:blipFill>
-                <a:ln>
-                  <a:solidFill>
-                    <a:schemeClr val="tx1">
-                      <a:lumMod val="95000"/>
-                      <a:lumOff val="5000"/>
-                    </a:schemeClr>
-                  </a:solidFill>
-                </a:ln>
-              </p:spPr>
-              <p:txBody>
-                <a:bodyPr/>
-                <a:lstStyle/>
-                <a:p>
-                  <a:r>
-                    <a:rPr lang="zh-CN" altLang="en-US">
-                      <a:noFill/>
-                    </a:rPr>
-                    <a:t> </a:t>
-                  </a:r>
-                </a:p>
-              </p:txBody>
-            </p:sp>
-          </mc:Fallback>
-        </mc:AlternateContent>
-        <mc:AlternateContent xmlns:mc="http://schemas.openxmlformats.org/markup-compatibility/2006">
-          <mc:Choice xmlns:a14="http://schemas.microsoft.com/office/drawing/2010/main" Requires="a14">
-            <p:sp>
-              <p:nvSpPr>
-                <p:cNvPr id="21" name="文本框 20">
-                  <a:extLst>
-                    <a:ext uri="{FF2B5EF4-FFF2-40B4-BE49-F238E27FC236}">
-                      <a16:creationId xmlns:a16="http://schemas.microsoft.com/office/drawing/2014/main" id="{F527022D-A830-FFD7-5173-AB87D66CCBD2}"/>
-                    </a:ext>
-                  </a:extLst>
-                </p:cNvPr>
-                <p:cNvSpPr txBox="1"/>
-                <p:nvPr/>
-              </p:nvSpPr>
-              <p:spPr>
-                <a:xfrm>
-                  <a:off x="8585571" y="2721204"/>
-                  <a:ext cx="461554" cy="369332"/>
-                </a:xfrm>
-                <a:prstGeom prst="rect">
-                  <a:avLst/>
-                </a:prstGeom>
-                <a:noFill/>
-              </p:spPr>
-              <p:txBody>
-                <a:bodyPr wrap="square" rtlCol="0">
-                  <a:spAutoFit/>
-                </a:bodyPr>
-                <a:lstStyle/>
-                <a:p>
-                  <a14:m>
-                    <m:oMathPara xmlns:m="http://schemas.openxmlformats.org/officeDocument/2006/math">
-                      <m:oMathParaPr>
-                        <m:jc m:val="centerGroup"/>
-                      </m:oMathParaPr>
-                      <m:oMath xmlns:m="http://schemas.openxmlformats.org/officeDocument/2006/math">
-                        <m:r>
-                          <a:rPr kumimoji="1" lang="zh-CN" altLang="en-US" b="1" i="1" dirty="0" smtClean="0">
-                            <a:solidFill>
-                              <a:srgbClr val="FF0000"/>
-                            </a:solidFill>
-                            <a:latin typeface="Cambria Math" panose="02040503050406030204" pitchFamily="18" charset="0"/>
-                          </a:rPr>
-                          <m:t>∗</m:t>
-                        </m:r>
-                      </m:oMath>
-                    </m:oMathPara>
-                  </a14:m>
-                  <a:endParaRPr kumimoji="1" lang="zh-CN" altLang="en-US" b="1" dirty="0">
-                    <a:solidFill>
-                      <a:srgbClr val="FF0000"/>
-                    </a:solidFill>
-                  </a:endParaRPr>
-                </a:p>
-              </p:txBody>
-            </p:sp>
-          </mc:Choice>
-          <mc:Fallback>
-            <p:sp>
-              <p:nvSpPr>
-                <p:cNvPr id="21" name="文本框 20">
-                  <a:extLst>
-                    <a:ext uri="{FF2B5EF4-FFF2-40B4-BE49-F238E27FC236}">
-                      <a16:creationId xmlns:a16="http://schemas.microsoft.com/office/drawing/2014/main" id="{F527022D-A830-FFD7-5173-AB87D66CCBD2}"/>
-                    </a:ext>
-                  </a:extLst>
-                </p:cNvPr>
-                <p:cNvSpPr txBox="1">
-                  <a:spLocks noRot="1" noChangeAspect="1" noMove="1" noResize="1" noEditPoints="1" noAdjustHandles="1" noChangeArrowheads="1" noChangeShapeType="1" noTextEdit="1"/>
-                </p:cNvSpPr>
-                <p:nvPr/>
-              </p:nvSpPr>
-              <p:spPr>
-                <a:xfrm>
-                  <a:off x="8585571" y="2721204"/>
-                  <a:ext cx="461554" cy="369332"/>
-                </a:xfrm>
-                <a:prstGeom prst="rect">
-                  <a:avLst/>
-                </a:prstGeom>
-                <a:blipFill>
-                  <a:blip r:embed="rId14"/>
-                  <a:stretch>
-                    <a:fillRect/>
-                  </a:stretch>
-                </a:blipFill>
-              </p:spPr>
-              <p:txBody>
-                <a:bodyPr/>
-                <a:lstStyle/>
-                <a:p>
-                  <a:r>
-                    <a:rPr lang="zh-CN" altLang="en-US">
-                      <a:noFill/>
-                    </a:rPr>
-                    <a:t> </a:t>
-                  </a:r>
-                </a:p>
-              </p:txBody>
-            </p:sp>
-          </mc:Fallback>
-        </mc:AlternateContent>
-        <mc:AlternateContent xmlns:mc="http://schemas.openxmlformats.org/markup-compatibility/2006">
-          <mc:Choice xmlns:a14="http://schemas.microsoft.com/office/drawing/2010/main" Requires="a14">
-            <p:sp>
-              <p:nvSpPr>
-                <p:cNvPr id="22" name="文本框 21">
-                  <a:extLst>
-                    <a:ext uri="{FF2B5EF4-FFF2-40B4-BE49-F238E27FC236}">
-                      <a16:creationId xmlns:a16="http://schemas.microsoft.com/office/drawing/2014/main" id="{C488FAEE-CA1B-B2B7-8ECD-9806F0C6FEB9}"/>
-                    </a:ext>
-                  </a:extLst>
-                </p:cNvPr>
-                <p:cNvSpPr txBox="1"/>
-                <p:nvPr/>
-              </p:nvSpPr>
-              <p:spPr>
-                <a:xfrm>
-                  <a:off x="9657813" y="2721204"/>
-                  <a:ext cx="461554" cy="369332"/>
-                </a:xfrm>
-                <a:prstGeom prst="rect">
-                  <a:avLst/>
-                </a:prstGeom>
-                <a:noFill/>
-              </p:spPr>
-              <p:txBody>
-                <a:bodyPr wrap="square" rtlCol="0">
-                  <a:spAutoFit/>
-                </a:bodyPr>
-                <a:lstStyle/>
-                <a:p>
-                  <a14:m>
-                    <m:oMathPara xmlns:m="http://schemas.openxmlformats.org/officeDocument/2006/math">
-                      <m:oMathParaPr>
-                        <m:jc m:val="centerGroup"/>
-                      </m:oMathParaPr>
-                      <m:oMath xmlns:m="http://schemas.openxmlformats.org/officeDocument/2006/math">
-                        <m:r>
-                          <a:rPr kumimoji="1" lang="en-US" altLang="zh-CN" b="0" i="1" dirty="0" smtClean="0">
-                            <a:latin typeface="Cambria Math" panose="02040503050406030204" pitchFamily="18" charset="0"/>
-                          </a:rPr>
-                          <m:t>+</m:t>
-                        </m:r>
-                      </m:oMath>
-                    </m:oMathPara>
-                  </a14:m>
-                  <a:endParaRPr kumimoji="1" lang="zh-CN" altLang="en-US" dirty="0"/>
-                </a:p>
-              </p:txBody>
-            </p:sp>
-          </mc:Choice>
-          <mc:Fallback>
-            <p:sp>
-              <p:nvSpPr>
-                <p:cNvPr id="22" name="文本框 21">
-                  <a:extLst>
-                    <a:ext uri="{FF2B5EF4-FFF2-40B4-BE49-F238E27FC236}">
-                      <a16:creationId xmlns:a16="http://schemas.microsoft.com/office/drawing/2014/main" id="{C488FAEE-CA1B-B2B7-8ECD-9806F0C6FEB9}"/>
-                    </a:ext>
-                  </a:extLst>
-                </p:cNvPr>
-                <p:cNvSpPr txBox="1">
-                  <a:spLocks noRot="1" noChangeAspect="1" noMove="1" noResize="1" noEditPoints="1" noAdjustHandles="1" noChangeArrowheads="1" noChangeShapeType="1" noTextEdit="1"/>
-                </p:cNvSpPr>
-                <p:nvPr/>
-              </p:nvSpPr>
-              <p:spPr>
-                <a:xfrm>
-                  <a:off x="9657813" y="2721204"/>
-                  <a:ext cx="461554" cy="369332"/>
-                </a:xfrm>
-                <a:prstGeom prst="rect">
-                  <a:avLst/>
-                </a:prstGeom>
-                <a:blipFill>
-                  <a:blip r:embed="rId15"/>
-                  <a:stretch>
-                    <a:fillRect/>
-                  </a:stretch>
-                </a:blipFill>
-              </p:spPr>
-              <p:txBody>
-                <a:bodyPr/>
-                <a:lstStyle/>
-                <a:p>
-                  <a:r>
-                    <a:rPr lang="zh-CN" altLang="en-US">
-                      <a:noFill/>
-                    </a:rPr>
-                    <a:t> </a:t>
-                  </a:r>
-                </a:p>
-              </p:txBody>
-            </p:sp>
-          </mc:Fallback>
-        </mc:AlternateContent>
-        <p:sp>
-          <p:nvSpPr>
-            <p:cNvPr id="24" name="矩形 23">
-              <a:extLst>
-                <a:ext uri="{FF2B5EF4-FFF2-40B4-BE49-F238E27FC236}">
-                  <a16:creationId xmlns:a16="http://schemas.microsoft.com/office/drawing/2014/main" id="{B68AE24E-B825-8889-B5EB-2E6E6013BD5D}"/>
-                </a:ext>
-              </a:extLst>
-            </p:cNvPr>
-            <p:cNvSpPr/>
-            <p:nvPr/>
-          </p:nvSpPr>
-          <p:spPr>
-            <a:xfrm>
-              <a:off x="6682747" y="2820962"/>
-              <a:ext cx="748937" cy="169817"/>
-            </a:xfrm>
-            <a:prstGeom prst="rect">
-              <a:avLst/>
-            </a:prstGeom>
-            <a:solidFill>
-              <a:srgbClr val="FFC000"/>
-            </a:solidFill>
-            <a:ln>
-              <a:solidFill>
-                <a:schemeClr val="tx1">
-                  <a:lumMod val="95000"/>
-                  <a:lumOff val="5000"/>
-                </a:schemeClr>
-              </a:solidFill>
-            </a:ln>
-          </p:spPr>
-          <p:style>
-            <a:lnRef idx="2">
-              <a:schemeClr val="accent1">
-                <a:shade val="15000"/>
-              </a:schemeClr>
-            </a:lnRef>
-            <a:fillRef idx="1">
-              <a:schemeClr val="accent1"/>
-            </a:fillRef>
-            <a:effectRef idx="0">
-              <a:schemeClr val="accent1"/>
-            </a:effectRef>
-            <a:fontRef idx="minor">
-              <a:schemeClr val="lt1"/>
-            </a:fontRef>
-          </p:style>
-          <p:txBody>
-            <a:bodyPr rtlCol="0" anchor="ctr"/>
-            <a:lstStyle/>
-            <a:p>
-              <a:pPr algn="ctr"/>
-              <a:endParaRPr kumimoji="1" lang="zh-CN" altLang="en-US" dirty="0">
-                <a:solidFill>
-                  <a:schemeClr val="tx1"/>
-                </a:solidFill>
-                <a:latin typeface="Calibri" panose="020F0502020204030204" pitchFamily="34" charset="0"/>
-                <a:cs typeface="Calibri" panose="020F0502020204030204" pitchFamily="34" charset="0"/>
-              </a:endParaRPr>
-            </a:p>
-          </p:txBody>
-        </p:sp>
-        <mc:AlternateContent xmlns:mc="http://schemas.openxmlformats.org/markup-compatibility/2006">
-          <mc:Choice xmlns:a14="http://schemas.microsoft.com/office/drawing/2010/main" Requires="a14">
-            <p:sp>
-              <p:nvSpPr>
-                <p:cNvPr id="25" name="文本框 24">
-                  <a:extLst>
-                    <a:ext uri="{FF2B5EF4-FFF2-40B4-BE49-F238E27FC236}">
-                      <a16:creationId xmlns:a16="http://schemas.microsoft.com/office/drawing/2014/main" id="{D3503A02-B243-C908-3412-8EDC88A8E147}"/>
-                    </a:ext>
-                  </a:extLst>
-                </p:cNvPr>
-                <p:cNvSpPr txBox="1"/>
-                <p:nvPr/>
-              </p:nvSpPr>
-              <p:spPr>
-                <a:xfrm>
-                  <a:off x="6818814" y="2393933"/>
-                  <a:ext cx="461554" cy="369332"/>
-                </a:xfrm>
-                <a:prstGeom prst="rect">
-                  <a:avLst/>
-                </a:prstGeom>
-                <a:noFill/>
-              </p:spPr>
-              <p:txBody>
-                <a:bodyPr wrap="square" rtlCol="0">
-                  <a:spAutoFit/>
-                </a:bodyPr>
-                <a:lstStyle/>
-                <a:p>
-                  <a14:m>
-                    <m:oMathPara xmlns:m="http://schemas.openxmlformats.org/officeDocument/2006/math">
-                      <m:oMathParaPr>
-                        <m:jc m:val="centerGroup"/>
-                      </m:oMathParaPr>
-                      <m:oMath xmlns:m="http://schemas.openxmlformats.org/officeDocument/2006/math">
-                        <m:sSub>
-                          <m:sSubPr>
-                            <m:ctrlPr>
-                              <a:rPr kumimoji="1" lang="en-US" altLang="zh-CN" b="0" i="1" dirty="0" smtClean="0">
-                                <a:latin typeface="Cambria Math" panose="02040503050406030204" pitchFamily="18" charset="0"/>
-                              </a:rPr>
-                            </m:ctrlPr>
-                          </m:sSubPr>
-                          <m:e>
-                            <m:r>
-                              <a:rPr kumimoji="1" lang="en-US" altLang="zh-CN" b="0" i="1" dirty="0" smtClean="0">
-                                <a:latin typeface="Cambria Math" panose="02040503050406030204" pitchFamily="18" charset="0"/>
-                              </a:rPr>
-                              <m:t>𝑞</m:t>
-                            </m:r>
-                          </m:e>
-                          <m:sub>
-                            <m:r>
-                              <a:rPr kumimoji="1" lang="en-US" altLang="zh-CN" b="0" i="1" dirty="0" smtClean="0">
-                                <a:latin typeface="Cambria Math" panose="02040503050406030204" pitchFamily="18" charset="0"/>
-                              </a:rPr>
-                              <m:t>𝑖</m:t>
-                            </m:r>
-                          </m:sub>
-                        </m:sSub>
-                        <m:r>
-                          <a:rPr kumimoji="1" lang="zh-CN" altLang="en-US" i="1" dirty="0" smtClean="0">
-                            <a:latin typeface="Cambria Math" panose="02040503050406030204" pitchFamily="18" charset="0"/>
-                          </a:rPr>
-                          <m:t> </m:t>
-                        </m:r>
-                      </m:oMath>
-                    </m:oMathPara>
-                  </a14:m>
-                  <a:endParaRPr kumimoji="1" lang="zh-CN" altLang="en-US" dirty="0"/>
-                </a:p>
-              </p:txBody>
-            </p:sp>
-          </mc:Choice>
-          <mc:Fallback>
-            <p:sp>
-              <p:nvSpPr>
-                <p:cNvPr id="25" name="文本框 24">
-                  <a:extLst>
-                    <a:ext uri="{FF2B5EF4-FFF2-40B4-BE49-F238E27FC236}">
-                      <a16:creationId xmlns:a16="http://schemas.microsoft.com/office/drawing/2014/main" id="{D3503A02-B243-C908-3412-8EDC88A8E147}"/>
-                    </a:ext>
-                  </a:extLst>
-                </p:cNvPr>
-                <p:cNvSpPr txBox="1">
-                  <a:spLocks noRot="1" noChangeAspect="1" noMove="1" noResize="1" noEditPoints="1" noAdjustHandles="1" noChangeArrowheads="1" noChangeShapeType="1" noTextEdit="1"/>
-                </p:cNvSpPr>
-                <p:nvPr/>
-              </p:nvSpPr>
-              <p:spPr>
-                <a:xfrm>
-                  <a:off x="6818814" y="2393933"/>
-                  <a:ext cx="461554" cy="369332"/>
-                </a:xfrm>
-                <a:prstGeom prst="rect">
-                  <a:avLst/>
-                </a:prstGeom>
-                <a:blipFill>
-                  <a:blip r:embed="rId16"/>
-                  <a:stretch>
-                    <a:fillRect r="-2703" b="-17241"/>
-                  </a:stretch>
-                </a:blipFill>
-              </p:spPr>
-              <p:txBody>
-                <a:bodyPr/>
-                <a:lstStyle/>
-                <a:p>
-                  <a:r>
-                    <a:rPr lang="zh-CN" altLang="en-US">
-                      <a:noFill/>
-                    </a:rPr>
-                    <a:t> </a:t>
-                  </a:r>
-                </a:p>
-              </p:txBody>
-            </p:sp>
-          </mc:Fallback>
-        </mc:AlternateContent>
-        <mc:AlternateContent xmlns:mc="http://schemas.openxmlformats.org/markup-compatibility/2006">
-          <mc:Choice xmlns:a14="http://schemas.microsoft.com/office/drawing/2010/main" Requires="a14">
-            <p:sp>
-              <p:nvSpPr>
-                <p:cNvPr id="26" name="文本框 25">
-                  <a:extLst>
-                    <a:ext uri="{FF2B5EF4-FFF2-40B4-BE49-F238E27FC236}">
-                      <a16:creationId xmlns:a16="http://schemas.microsoft.com/office/drawing/2014/main" id="{E312FC32-ADB8-1474-4F26-9F47377E0524}"/>
-                    </a:ext>
-                  </a:extLst>
-                </p:cNvPr>
-                <p:cNvSpPr txBox="1"/>
-                <p:nvPr/>
-              </p:nvSpPr>
-              <p:spPr>
-                <a:xfrm>
-                  <a:off x="7389227" y="2721204"/>
-                  <a:ext cx="461554" cy="369332"/>
-                </a:xfrm>
-                <a:prstGeom prst="rect">
-                  <a:avLst/>
-                </a:prstGeom>
-                <a:noFill/>
-              </p:spPr>
-              <p:txBody>
-                <a:bodyPr wrap="square" rtlCol="0">
-                  <a:spAutoFit/>
-                </a:bodyPr>
-                <a:lstStyle/>
-                <a:p>
-                  <a14:m>
-                    <m:oMathPara xmlns:m="http://schemas.openxmlformats.org/officeDocument/2006/math">
-                      <m:oMathParaPr>
-                        <m:jc m:val="centerGroup"/>
-                      </m:oMathParaPr>
-                      <m:oMath xmlns:m="http://schemas.openxmlformats.org/officeDocument/2006/math">
-                        <m:r>
-                          <a:rPr kumimoji="1" lang="zh-CN" altLang="en-US" b="1" i="1" dirty="0" smtClean="0">
-                            <a:solidFill>
-                              <a:srgbClr val="FF0000"/>
-                            </a:solidFill>
-                            <a:latin typeface="Cambria Math" panose="02040503050406030204" pitchFamily="18" charset="0"/>
-                          </a:rPr>
-                          <m:t>∗</m:t>
-                        </m:r>
-                      </m:oMath>
-                    </m:oMathPara>
-                  </a14:m>
-                  <a:endParaRPr kumimoji="1" lang="zh-CN" altLang="en-US" b="1" dirty="0">
-                    <a:solidFill>
-                      <a:srgbClr val="FF0000"/>
-                    </a:solidFill>
-                  </a:endParaRPr>
-                </a:p>
-              </p:txBody>
-            </p:sp>
-          </mc:Choice>
-          <mc:Fallback>
-            <p:sp>
-              <p:nvSpPr>
-                <p:cNvPr id="26" name="文本框 25">
-                  <a:extLst>
-                    <a:ext uri="{FF2B5EF4-FFF2-40B4-BE49-F238E27FC236}">
-                      <a16:creationId xmlns:a16="http://schemas.microsoft.com/office/drawing/2014/main" id="{E312FC32-ADB8-1474-4F26-9F47377E0524}"/>
-                    </a:ext>
-                  </a:extLst>
-                </p:cNvPr>
-                <p:cNvSpPr txBox="1">
-                  <a:spLocks noRot="1" noChangeAspect="1" noMove="1" noResize="1" noEditPoints="1" noAdjustHandles="1" noChangeArrowheads="1" noChangeShapeType="1" noTextEdit="1"/>
-                </p:cNvSpPr>
-                <p:nvPr/>
-              </p:nvSpPr>
-              <p:spPr>
-                <a:xfrm>
-                  <a:off x="7389227" y="2721204"/>
-                  <a:ext cx="461554" cy="369332"/>
-                </a:xfrm>
-                <a:prstGeom prst="rect">
-                  <a:avLst/>
-                </a:prstGeom>
-                <a:blipFill>
-                  <a:blip r:embed="rId17"/>
-                  <a:stretch>
-                    <a:fillRect/>
-                  </a:stretch>
-                </a:blipFill>
-              </p:spPr>
-              <p:txBody>
-                <a:bodyPr/>
-                <a:lstStyle/>
-                <a:p>
-                  <a:r>
-                    <a:rPr lang="zh-CN" altLang="en-US">
-                      <a:noFill/>
-                    </a:rPr>
-                    <a:t> </a:t>
-                  </a:r>
-                </a:p>
-              </p:txBody>
-            </p:sp>
-          </mc:Fallback>
-        </mc:AlternateContent>
-        <p:sp>
-          <p:nvSpPr>
-            <p:cNvPr id="27" name="双中括号 26">
-              <a:extLst>
-                <a:ext uri="{FF2B5EF4-FFF2-40B4-BE49-F238E27FC236}">
-                  <a16:creationId xmlns:a16="http://schemas.microsoft.com/office/drawing/2014/main" id="{4943CC6A-2EB3-0729-5C38-582C7DFC36D7}"/>
-                </a:ext>
-              </a:extLst>
-            </p:cNvPr>
-            <p:cNvSpPr/>
-            <p:nvPr/>
-          </p:nvSpPr>
-          <p:spPr>
-            <a:xfrm>
-              <a:off x="7843160" y="1967525"/>
-              <a:ext cx="3861160" cy="1466612"/>
-            </a:xfrm>
-            <a:prstGeom prst="bracketPair">
-              <a:avLst>
-                <a:gd name="adj" fmla="val 8491"/>
-              </a:avLst>
-            </a:prstGeom>
-            <a:ln>
-              <a:solidFill>
-                <a:schemeClr val="tx1"/>
-              </a:solidFill>
-            </a:ln>
-          </p:spPr>
-          <p:style>
-            <a:lnRef idx="2">
-              <a:schemeClr val="accent1"/>
-            </a:lnRef>
-            <a:fillRef idx="0">
-              <a:schemeClr val="accent1"/>
-            </a:fillRef>
-            <a:effectRef idx="1">
-              <a:schemeClr val="accent1"/>
-            </a:effectRef>
-            <a:fontRef idx="minor">
-              <a:schemeClr val="tx1"/>
-            </a:fontRef>
-          </p:style>
-          <p:txBody>
-            <a:bodyPr rtlCol="0" anchor="ctr"/>
-            <a:lstStyle/>
-            <a:p>
-              <a:pPr algn="ctr"/>
-              <a:endParaRPr kumimoji="1" lang="zh-CN" altLang="en-US"/>
-            </a:p>
-          </p:txBody>
-        </p:sp>
-        <p:sp>
-          <p:nvSpPr>
-            <p:cNvPr id="30" name="矩形 29">
-              <a:extLst>
-                <a:ext uri="{FF2B5EF4-FFF2-40B4-BE49-F238E27FC236}">
-                  <a16:creationId xmlns:a16="http://schemas.microsoft.com/office/drawing/2014/main" id="{2FC989D1-6446-8FF0-A9F0-863EDC95FE08}"/>
-                </a:ext>
-              </a:extLst>
-            </p:cNvPr>
-            <p:cNvSpPr/>
-            <p:nvPr/>
-          </p:nvSpPr>
-          <p:spPr>
-            <a:xfrm>
-              <a:off x="5453746" y="2820962"/>
-              <a:ext cx="748937" cy="169817"/>
-            </a:xfrm>
-            <a:prstGeom prst="rect">
-              <a:avLst/>
-            </a:prstGeom>
-            <a:solidFill>
-              <a:srgbClr val="92D050"/>
-            </a:solidFill>
-            <a:ln>
-              <a:solidFill>
-                <a:schemeClr val="tx1">
-                  <a:lumMod val="95000"/>
-                  <a:lumOff val="5000"/>
-                </a:schemeClr>
-              </a:solidFill>
-            </a:ln>
-          </p:spPr>
-          <p:style>
-            <a:lnRef idx="2">
-              <a:schemeClr val="accent1">
-                <a:shade val="15000"/>
-              </a:schemeClr>
-            </a:lnRef>
-            <a:fillRef idx="1">
-              <a:schemeClr val="accent1"/>
-            </a:fillRef>
-            <a:effectRef idx="0">
-              <a:schemeClr val="accent1"/>
-            </a:effectRef>
-            <a:fontRef idx="minor">
-              <a:schemeClr val="lt1"/>
-            </a:fontRef>
-          </p:style>
-          <p:txBody>
-            <a:bodyPr rtlCol="0" anchor="ctr"/>
-            <a:lstStyle/>
-            <a:p>
-              <a:pPr algn="ctr"/>
-              <a:endParaRPr kumimoji="1" lang="zh-CN" altLang="en-US" dirty="0">
-                <a:solidFill>
-                  <a:schemeClr val="tx1"/>
-                </a:solidFill>
-                <a:latin typeface="Calibri" panose="020F0502020204030204" pitchFamily="34" charset="0"/>
-                <a:cs typeface="Calibri" panose="020F0502020204030204" pitchFamily="34" charset="0"/>
-              </a:endParaRPr>
-            </a:p>
-          </p:txBody>
-        </p:sp>
-        <mc:AlternateContent xmlns:mc="http://schemas.openxmlformats.org/markup-compatibility/2006">
-          <mc:Choice xmlns:a14="http://schemas.microsoft.com/office/drawing/2010/main" Requires="a14">
-            <p:sp>
-              <p:nvSpPr>
-                <p:cNvPr id="31" name="文本框 30">
-                  <a:extLst>
-                    <a:ext uri="{FF2B5EF4-FFF2-40B4-BE49-F238E27FC236}">
-                      <a16:creationId xmlns:a16="http://schemas.microsoft.com/office/drawing/2014/main" id="{CE2A9B37-957B-7212-8680-F7AB603E39F0}"/>
-                    </a:ext>
-                  </a:extLst>
-                </p:cNvPr>
-                <p:cNvSpPr txBox="1"/>
-                <p:nvPr/>
-              </p:nvSpPr>
-              <p:spPr>
-                <a:xfrm>
-                  <a:off x="5574578" y="2393933"/>
-                  <a:ext cx="461554" cy="369332"/>
-                </a:xfrm>
-                <a:prstGeom prst="rect">
-                  <a:avLst/>
-                </a:prstGeom>
-                <a:noFill/>
-              </p:spPr>
-              <p:txBody>
-                <a:bodyPr wrap="square" rtlCol="0">
-                  <a:spAutoFit/>
-                </a:bodyPr>
-                <a:lstStyle/>
-                <a:p>
-                  <a14:m>
-                    <m:oMathPara xmlns:m="http://schemas.openxmlformats.org/officeDocument/2006/math">
-                      <m:oMathParaPr>
-                        <m:jc m:val="centerGroup"/>
-                      </m:oMathParaPr>
-                      <m:oMath xmlns:m="http://schemas.openxmlformats.org/officeDocument/2006/math">
-                        <m:sSub>
-                          <m:sSubPr>
-                            <m:ctrlPr>
-                              <a:rPr kumimoji="1" lang="en-US" altLang="zh-CN" b="0" i="1" dirty="0" smtClean="0">
-                                <a:latin typeface="Cambria Math" panose="02040503050406030204" pitchFamily="18" charset="0"/>
-                              </a:rPr>
-                            </m:ctrlPr>
-                          </m:sSubPr>
-                          <m:e>
-                            <m:r>
-                              <a:rPr kumimoji="1" lang="en-US" altLang="zh-CN" b="0" i="1" dirty="0" smtClean="0">
-                                <a:latin typeface="Cambria Math" panose="02040503050406030204" pitchFamily="18" charset="0"/>
-                              </a:rPr>
-                              <m:t>𝑜</m:t>
-                            </m:r>
-                          </m:e>
-                          <m:sub>
-                            <m:r>
-                              <a:rPr kumimoji="1" lang="en-US" altLang="zh-CN" b="0" i="1" dirty="0" smtClean="0">
-                                <a:latin typeface="Cambria Math" panose="02040503050406030204" pitchFamily="18" charset="0"/>
-                              </a:rPr>
-                              <m:t>𝑖</m:t>
-                            </m:r>
-                          </m:sub>
-                        </m:sSub>
-                        <m:r>
-                          <a:rPr kumimoji="1" lang="zh-CN" altLang="en-US" i="1" dirty="0" smtClean="0">
-                            <a:latin typeface="Cambria Math" panose="02040503050406030204" pitchFamily="18" charset="0"/>
-                          </a:rPr>
-                          <m:t> </m:t>
-                        </m:r>
-                      </m:oMath>
-                    </m:oMathPara>
-                  </a14:m>
-                  <a:endParaRPr kumimoji="1" lang="zh-CN" altLang="en-US" dirty="0"/>
-                </a:p>
-              </p:txBody>
-            </p:sp>
-          </mc:Choice>
-          <mc:Fallback>
-            <p:sp>
-              <p:nvSpPr>
-                <p:cNvPr id="31" name="文本框 30">
-                  <a:extLst>
-                    <a:ext uri="{FF2B5EF4-FFF2-40B4-BE49-F238E27FC236}">
-                      <a16:creationId xmlns:a16="http://schemas.microsoft.com/office/drawing/2014/main" id="{CE2A9B37-957B-7212-8680-F7AB603E39F0}"/>
-                    </a:ext>
-                  </a:extLst>
-                </p:cNvPr>
-                <p:cNvSpPr txBox="1">
-                  <a:spLocks noRot="1" noChangeAspect="1" noMove="1" noResize="1" noEditPoints="1" noAdjustHandles="1" noChangeArrowheads="1" noChangeShapeType="1" noTextEdit="1"/>
-                </p:cNvSpPr>
-                <p:nvPr/>
-              </p:nvSpPr>
-              <p:spPr>
-                <a:xfrm>
-                  <a:off x="5574578" y="2393933"/>
-                  <a:ext cx="461554" cy="369332"/>
-                </a:xfrm>
-                <a:prstGeom prst="rect">
-                  <a:avLst/>
-                </a:prstGeom>
-                <a:blipFill>
-                  <a:blip r:embed="rId18"/>
-                  <a:stretch>
-                    <a:fillRect r="-2703" b="-17241"/>
-                  </a:stretch>
-                </a:blipFill>
-              </p:spPr>
-              <p:txBody>
-                <a:bodyPr/>
-                <a:lstStyle/>
-                <a:p>
-                  <a:r>
-                    <a:rPr lang="zh-CN" altLang="en-US">
-                      <a:noFill/>
-                    </a:rPr>
-                    <a:t> </a:t>
-                  </a:r>
-                </a:p>
-              </p:txBody>
-            </p:sp>
-          </mc:Fallback>
-        </mc:AlternateContent>
-        <mc:AlternateContent xmlns:mc="http://schemas.openxmlformats.org/markup-compatibility/2006">
-          <mc:Choice xmlns:a14="http://schemas.microsoft.com/office/drawing/2010/main" Requires="a14">
-            <p:sp>
-              <p:nvSpPr>
-                <p:cNvPr id="32" name="文本框 31">
-                  <a:extLst>
-                    <a:ext uri="{FF2B5EF4-FFF2-40B4-BE49-F238E27FC236}">
-                      <a16:creationId xmlns:a16="http://schemas.microsoft.com/office/drawing/2014/main" id="{462403DE-A227-FE15-9355-43797A2BB5BF}"/>
-                    </a:ext>
-                  </a:extLst>
-                </p:cNvPr>
-                <p:cNvSpPr txBox="1"/>
-                <p:nvPr/>
-              </p:nvSpPr>
-              <p:spPr>
-                <a:xfrm>
-                  <a:off x="6191798" y="2721204"/>
-                  <a:ext cx="461554" cy="369332"/>
-                </a:xfrm>
-                <a:prstGeom prst="rect">
-                  <a:avLst/>
-                </a:prstGeom>
-                <a:noFill/>
-              </p:spPr>
-              <p:txBody>
-                <a:bodyPr wrap="square" rtlCol="0">
-                  <a:spAutoFit/>
-                </a:bodyPr>
-                <a:lstStyle/>
-                <a:p>
-                  <a14:m>
-                    <m:oMathPara xmlns:m="http://schemas.openxmlformats.org/officeDocument/2006/math">
-                      <m:oMathParaPr>
-                        <m:jc m:val="centerGroup"/>
-                      </m:oMathParaPr>
-                      <m:oMath xmlns:m="http://schemas.openxmlformats.org/officeDocument/2006/math">
-                        <m:r>
-                          <a:rPr kumimoji="1" lang="en-US" altLang="zh-CN" b="0" i="1" dirty="0" smtClean="0">
-                            <a:latin typeface="Cambria Math" panose="02040503050406030204" pitchFamily="18" charset="0"/>
-                          </a:rPr>
-                          <m:t>=</m:t>
-                        </m:r>
-                      </m:oMath>
-                    </m:oMathPara>
-                  </a14:m>
-                  <a:endParaRPr kumimoji="1" lang="zh-CN" altLang="en-US" dirty="0"/>
-                </a:p>
-              </p:txBody>
-            </p:sp>
-          </mc:Choice>
-          <mc:Fallback>
-            <p:sp>
-              <p:nvSpPr>
-                <p:cNvPr id="32" name="文本框 31">
-                  <a:extLst>
-                    <a:ext uri="{FF2B5EF4-FFF2-40B4-BE49-F238E27FC236}">
-                      <a16:creationId xmlns:a16="http://schemas.microsoft.com/office/drawing/2014/main" id="{462403DE-A227-FE15-9355-43797A2BB5BF}"/>
-                    </a:ext>
-                  </a:extLst>
-                </p:cNvPr>
-                <p:cNvSpPr txBox="1">
-                  <a:spLocks noRot="1" noChangeAspect="1" noMove="1" noResize="1" noEditPoints="1" noAdjustHandles="1" noChangeArrowheads="1" noChangeShapeType="1" noTextEdit="1"/>
-                </p:cNvSpPr>
-                <p:nvPr/>
-              </p:nvSpPr>
-              <p:spPr>
-                <a:xfrm>
-                  <a:off x="6191798" y="2721204"/>
-                  <a:ext cx="461554" cy="369332"/>
-                </a:xfrm>
-                <a:prstGeom prst="rect">
-                  <a:avLst/>
-                </a:prstGeom>
-                <a:blipFill>
-                  <a:blip r:embed="rId19"/>
-                  <a:stretch>
-                    <a:fillRect/>
-                  </a:stretch>
-                </a:blipFill>
-              </p:spPr>
-              <p:txBody>
-                <a:bodyPr/>
-                <a:lstStyle/>
-                <a:p>
-                  <a:r>
-                    <a:rPr lang="zh-CN" altLang="en-US">
-                      <a:noFill/>
-                    </a:rPr>
-                    <a:t> </a:t>
-                  </a:r>
-                </a:p>
-              </p:txBody>
-            </p:sp>
-          </mc:Fallback>
-        </mc:AlternateContent>
-        <p:sp>
-          <p:nvSpPr>
-            <p:cNvPr id="35" name="文本框 34">
-              <a:extLst>
-                <a:ext uri="{FF2B5EF4-FFF2-40B4-BE49-F238E27FC236}">
-                  <a16:creationId xmlns:a16="http://schemas.microsoft.com/office/drawing/2014/main" id="{2DA6319B-B7FA-549F-AA21-61518BCB8F26}"/>
-                </a:ext>
-              </a:extLst>
-            </p:cNvPr>
-            <p:cNvSpPr txBox="1"/>
-            <p:nvPr/>
-          </p:nvSpPr>
-          <p:spPr>
-            <a:xfrm>
-              <a:off x="7280368" y="1150204"/>
-              <a:ext cx="3021869" cy="646331"/>
-            </a:xfrm>
-            <a:prstGeom prst="rect">
-              <a:avLst/>
-            </a:prstGeom>
-            <a:noFill/>
-          </p:spPr>
-          <p:txBody>
-            <a:bodyPr wrap="square" rtlCol="0">
-              <a:spAutoFit/>
-            </a:bodyPr>
-            <a:lstStyle/>
-            <a:p>
-              <a:r>
-                <a:rPr kumimoji="1" lang="zh-CN" altLang="en-US" sz="1200" dirty="0">
-                  <a:latin typeface="Microsoft YaHei" panose="020B0503020204020204" pitchFamily="34" charset="-122"/>
-                  <a:ea typeface="Microsoft YaHei" panose="020B0503020204020204" pitchFamily="34" charset="-122"/>
-                </a:rPr>
-                <a:t>依赖于输入对</a:t>
-              </a:r>
-              <a:r>
-                <a:rPr kumimoji="1" lang="en-US" altLang="zh-CN" sz="1200" dirty="0">
-                  <a:latin typeface="Microsoft YaHei" panose="020B0503020204020204" pitchFamily="34" charset="-122"/>
-                  <a:ea typeface="Microsoft YaHei" panose="020B0503020204020204" pitchFamily="34" charset="-122"/>
-                </a:rPr>
-                <a:t>RNN</a:t>
-              </a:r>
-              <a:r>
-                <a:rPr kumimoji="1" lang="zh-CN" altLang="en-US" sz="1200" dirty="0">
-                  <a:latin typeface="Microsoft YaHei" panose="020B0503020204020204" pitchFamily="34" charset="-122"/>
-                  <a:ea typeface="Microsoft YaHei" panose="020B0503020204020204" pitchFamily="34" charset="-122"/>
-                </a:rPr>
-                <a:t>的历史状态进行衰减，这里和</a:t>
-              </a:r>
-              <a:r>
-                <a:rPr kumimoji="1" lang="en-US" altLang="zh-CN" sz="1200" dirty="0">
-                  <a:latin typeface="Microsoft YaHei" panose="020B0503020204020204" pitchFamily="34" charset="-122"/>
-                  <a:ea typeface="Microsoft YaHei" panose="020B0503020204020204" pitchFamily="34" charset="-122"/>
-                </a:rPr>
-                <a:t>mamba</a:t>
-              </a:r>
-              <a:r>
-                <a:rPr kumimoji="1" lang="zh-CN" altLang="en-US" sz="1200" dirty="0">
-                  <a:latin typeface="Microsoft YaHei" panose="020B0503020204020204" pitchFamily="34" charset="-122"/>
-                  <a:ea typeface="Microsoft YaHei" panose="020B0503020204020204" pitchFamily="34" charset="-122"/>
-                </a:rPr>
-                <a:t>很类似，通过一个双层</a:t>
-              </a:r>
-              <a:r>
-                <a:rPr kumimoji="1" lang="en-US" altLang="zh-CN" sz="1200" dirty="0">
-                  <a:latin typeface="Microsoft YaHei" panose="020B0503020204020204" pitchFamily="34" charset="-122"/>
-                  <a:ea typeface="Microsoft YaHei" panose="020B0503020204020204" pitchFamily="34" charset="-122"/>
-                </a:rPr>
-                <a:t>DNN</a:t>
-              </a:r>
-              <a:r>
-                <a:rPr kumimoji="1" lang="zh-CN" altLang="en-US" sz="1200" dirty="0">
-                  <a:latin typeface="Microsoft YaHei" panose="020B0503020204020204" pitchFamily="34" charset="-122"/>
-                  <a:ea typeface="Microsoft YaHei" panose="020B0503020204020204" pitchFamily="34" charset="-122"/>
-                </a:rPr>
-                <a:t>学习得到。</a:t>
-              </a:r>
-            </a:p>
-          </p:txBody>
-        </p:sp>
-        <p:cxnSp>
-          <p:nvCxnSpPr>
-            <p:cNvPr id="37" name="曲线连接符 36">
-              <a:extLst>
-                <a:ext uri="{FF2B5EF4-FFF2-40B4-BE49-F238E27FC236}">
-                  <a16:creationId xmlns:a16="http://schemas.microsoft.com/office/drawing/2014/main" id="{1F0030D2-7D57-5192-E7A2-06AADDE7B320}"/>
-                </a:ext>
-              </a:extLst>
-            </p:cNvPr>
-            <p:cNvCxnSpPr>
-              <a:stCxn id="35" idx="2"/>
-              <a:endCxn id="20" idx="0"/>
-            </p:cNvCxnSpPr>
-            <p:nvPr/>
-          </p:nvCxnSpPr>
-          <p:spPr>
-            <a:xfrm rot="5400000">
-              <a:off x="8206703" y="1946801"/>
-              <a:ext cx="734866" cy="434334"/>
-            </a:xfrm>
-            <a:prstGeom prst="curvedConnector3">
-              <a:avLst/>
-            </a:prstGeom>
-            <a:ln>
-              <a:solidFill>
-                <a:schemeClr val="tx1">
-                  <a:lumMod val="50000"/>
-                  <a:lumOff val="50000"/>
-                </a:schemeClr>
-              </a:solidFill>
-              <a:tailEnd type="triangle" w="med" len="lg"/>
-            </a:ln>
-          </p:spPr>
-          <p:style>
-            <a:lnRef idx="2">
-              <a:schemeClr val="accent1"/>
-            </a:lnRef>
-            <a:fillRef idx="0">
-              <a:schemeClr val="accent1"/>
-            </a:fillRef>
-            <a:effectRef idx="1">
-              <a:schemeClr val="accent1"/>
-            </a:effectRef>
-            <a:fontRef idx="minor">
-              <a:schemeClr val="tx1"/>
-            </a:fontRef>
-          </p:style>
-        </p:cxnSp>
-        <mc:AlternateContent xmlns:mc="http://schemas.openxmlformats.org/markup-compatibility/2006">
-          <mc:Choice xmlns:a14="http://schemas.microsoft.com/office/drawing/2010/main" Requires="a14">
-            <p:sp>
-              <p:nvSpPr>
-                <p:cNvPr id="38" name="文本框 37">
-                  <a:extLst>
-                    <a:ext uri="{FF2B5EF4-FFF2-40B4-BE49-F238E27FC236}">
-                      <a16:creationId xmlns:a16="http://schemas.microsoft.com/office/drawing/2014/main" id="{35F538FA-8CF4-749E-0323-8CD3FFB1484A}"/>
-                    </a:ext>
-                  </a:extLst>
-                </p:cNvPr>
-                <p:cNvSpPr txBox="1"/>
-                <p:nvPr/>
-              </p:nvSpPr>
-              <p:spPr>
-                <a:xfrm>
-                  <a:off x="6505303" y="3639737"/>
-                  <a:ext cx="1968137" cy="1015663"/>
-                </a:xfrm>
-                <a:prstGeom prst="rect">
-                  <a:avLst/>
-                </a:prstGeom>
-                <a:noFill/>
-              </p:spPr>
-              <p:txBody>
-                <a:bodyPr wrap="square" rtlCol="0">
-                  <a:spAutoFit/>
-                </a:bodyPr>
-                <a:lstStyle/>
-                <a:p>
-                  <a:r>
-                    <a:rPr kumimoji="1" lang="zh-CN" altLang="en-US" sz="1200" dirty="0">
-                      <a:latin typeface="Microsoft YaHei" panose="020B0503020204020204" pitchFamily="34" charset="-122"/>
-                      <a:ea typeface="Microsoft YaHei" panose="020B0503020204020204" pitchFamily="34" charset="-122"/>
-                    </a:rPr>
-                    <a:t>这个图里面</a:t>
-                  </a:r>
-                  <a:r>
-                    <a:rPr kumimoji="1" lang="en-US" altLang="zh-CN" sz="1200" dirty="0">
-                      <a:latin typeface="Microsoft YaHei" panose="020B0503020204020204" pitchFamily="34" charset="-122"/>
-                      <a:ea typeface="Microsoft YaHei" panose="020B0503020204020204" pitchFamily="34" charset="-122"/>
-                    </a:rPr>
-                    <a:t>plot</a:t>
-                  </a:r>
-                  <a:r>
-                    <a:rPr kumimoji="1" lang="zh-CN" altLang="en-US" sz="1200" dirty="0">
-                      <a:latin typeface="Microsoft YaHei" panose="020B0503020204020204" pitchFamily="34" charset="-122"/>
-                      <a:ea typeface="Microsoft YaHei" panose="020B0503020204020204" pitchFamily="34" charset="-122"/>
-                    </a:rPr>
-                    <a:t>的是向量形式的单个</a:t>
-                  </a:r>
-                  <a:r>
-                    <a:rPr kumimoji="1" lang="en-US" altLang="zh-CN" sz="1200" dirty="0">
-                      <a:latin typeface="Microsoft YaHei" panose="020B0503020204020204" pitchFamily="34" charset="-122"/>
-                      <a:ea typeface="Microsoft YaHei" panose="020B0503020204020204" pitchFamily="34" charset="-122"/>
-                    </a:rPr>
-                    <a:t>query/</a:t>
-                  </a:r>
-                  <a:r>
-                    <a:rPr kumimoji="1" lang="zh-CN" altLang="en-US" sz="1200" dirty="0">
-                      <a:latin typeface="Microsoft YaHei" panose="020B0503020204020204" pitchFamily="34" charset="-122"/>
-                      <a:ea typeface="Microsoft YaHei" panose="020B0503020204020204" pitchFamily="34" charset="-122"/>
-                    </a:rPr>
-                    <a:t> </a:t>
-                  </a:r>
-                  <a:r>
-                    <a:rPr kumimoji="1" lang="en-US" altLang="zh-CN" sz="1200" dirty="0">
-                      <a:latin typeface="Microsoft YaHei" panose="020B0503020204020204" pitchFamily="34" charset="-122"/>
-                      <a:ea typeface="Microsoft YaHei" panose="020B0503020204020204" pitchFamily="34" charset="-122"/>
-                    </a:rPr>
-                    <a:t>key/</a:t>
-                  </a:r>
-                  <a:r>
-                    <a:rPr kumimoji="1" lang="zh-CN" altLang="en-US" sz="1200" dirty="0">
-                      <a:latin typeface="Microsoft YaHei" panose="020B0503020204020204" pitchFamily="34" charset="-122"/>
-                      <a:ea typeface="Microsoft YaHei" panose="020B0503020204020204" pitchFamily="34" charset="-122"/>
-                    </a:rPr>
-                    <a:t> </a:t>
-                  </a:r>
-                  <a:r>
-                    <a:rPr kumimoji="1" lang="en-US" altLang="zh-CN" sz="1200" dirty="0">
-                      <a:latin typeface="Microsoft YaHei" panose="020B0503020204020204" pitchFamily="34" charset="-122"/>
-                      <a:ea typeface="Microsoft YaHei" panose="020B0503020204020204" pitchFamily="34" charset="-122"/>
-                    </a:rPr>
-                    <a:t>value</a:t>
-                  </a:r>
-                  <a:r>
-                    <a:rPr kumimoji="1" lang="zh-CN" altLang="en-US" sz="1200" dirty="0">
-                      <a:latin typeface="Microsoft YaHei" panose="020B0503020204020204" pitchFamily="34" charset="-122"/>
-                      <a:ea typeface="Microsoft YaHei" panose="020B0503020204020204" pitchFamily="34" charset="-122"/>
-                    </a:rPr>
-                    <a:t>进行计算的过程，这里的 </a:t>
-                  </a:r>
-                  <a14:m>
+      <mc:AlternateContent xmlns:mc="http://schemas.openxmlformats.org/markup-compatibility/2006">
+        <mc:Choice xmlns:a14="http://schemas.microsoft.com/office/drawing/2010/main" Requires="a14">
+          <p:sp>
+            <p:nvSpPr>
+              <p:cNvPr id="26" name="文本框 25">
+                <a:extLst>
+                  <a:ext uri="{FF2B5EF4-FFF2-40B4-BE49-F238E27FC236}">
+                    <a16:creationId xmlns:a16="http://schemas.microsoft.com/office/drawing/2014/main" id="{E312FC32-ADB8-1474-4F26-9F47377E0524}"/>
+                  </a:ext>
+                </a:extLst>
+              </p:cNvPr>
+              <p:cNvSpPr txBox="1"/>
+              <p:nvPr/>
+            </p:nvSpPr>
+            <p:spPr>
+              <a:xfrm>
+                <a:off x="7067010" y="3183259"/>
+                <a:ext cx="461554" cy="369332"/>
+              </a:xfrm>
+              <a:prstGeom prst="rect">
+                <a:avLst/>
+              </a:prstGeom>
+              <a:noFill/>
+            </p:spPr>
+            <p:txBody>
+              <a:bodyPr wrap="square" rtlCol="0">
+                <a:spAutoFit/>
+              </a:bodyPr>
+              <a:lstStyle/>
+              <a:p>
+                <a:pPr/>
+                <a14:m>
+                  <m:oMathPara xmlns:m="http://schemas.openxmlformats.org/officeDocument/2006/math">
+                    <m:oMathParaPr>
+                      <m:jc m:val="centerGroup"/>
+                    </m:oMathParaPr>
                     <m:oMath xmlns:m="http://schemas.openxmlformats.org/officeDocument/2006/math">
                       <m:r>
-                        <a:rPr kumimoji="1" lang="zh-CN" altLang="en-US" sz="1200" b="1" i="1" smtClean="0">
+                        <a:rPr kumimoji="1" lang="zh-CN" altLang="en-US" b="1" i="1" dirty="0" smtClean="0">
                           <a:solidFill>
                             <a:srgbClr val="FF0000"/>
                           </a:solidFill>
                           <a:latin typeface="Cambria Math" panose="02040503050406030204" pitchFamily="18" charset="0"/>
-                          <a:ea typeface="Microsoft YaHei" panose="020B0503020204020204" pitchFamily="34" charset="-122"/>
                         </a:rPr>
                         <m:t>∗</m:t>
                       </m:r>
                     </m:oMath>
-                  </a14:m>
-                  <a:r>
-                    <a:rPr kumimoji="1" lang="zh-CN" altLang="en-US" sz="1200" dirty="0">
-                      <a:latin typeface="Microsoft YaHei" panose="020B0503020204020204" pitchFamily="34" charset="-122"/>
-                      <a:ea typeface="Microsoft YaHei" panose="020B0503020204020204" pitchFamily="34" charset="-122"/>
-                    </a:rPr>
-                    <a:t> 的数据并行化之后都是矩阵乘。</a:t>
-                  </a:r>
-                </a:p>
-              </p:txBody>
-            </p:sp>
-          </mc:Choice>
-          <mc:Fallback>
-            <p:sp>
-              <p:nvSpPr>
-                <p:cNvPr id="38" name="文本框 37">
-                  <a:extLst>
-                    <a:ext uri="{FF2B5EF4-FFF2-40B4-BE49-F238E27FC236}">
-                      <a16:creationId xmlns:a16="http://schemas.microsoft.com/office/drawing/2014/main" id="{35F538FA-8CF4-749E-0323-8CD3FFB1484A}"/>
-                    </a:ext>
-                  </a:extLst>
-                </p:cNvPr>
-                <p:cNvSpPr txBox="1">
-                  <a:spLocks noRot="1" noChangeAspect="1" noMove="1" noResize="1" noEditPoints="1" noAdjustHandles="1" noChangeArrowheads="1" noChangeShapeType="1" noTextEdit="1"/>
-                </p:cNvSpPr>
-                <p:nvPr/>
-              </p:nvSpPr>
-              <p:spPr>
-                <a:xfrm>
-                  <a:off x="6505303" y="3639737"/>
-                  <a:ext cx="1968137" cy="1015663"/>
-                </a:xfrm>
-                <a:prstGeom prst="rect">
-                  <a:avLst/>
-                </a:prstGeom>
-                <a:blipFill>
-                  <a:blip r:embed="rId20"/>
-                  <a:stretch>
-                    <a:fillRect b="-3750"/>
-                  </a:stretch>
-                </a:blipFill>
-              </p:spPr>
-              <p:txBody>
-                <a:bodyPr/>
-                <a:lstStyle/>
-                <a:p>
-                  <a:r>
-                    <a:rPr lang="zh-CN" altLang="en-US">
-                      <a:noFill/>
-                    </a:rPr>
-                    <a:t> </a:t>
-                  </a:r>
-                </a:p>
-              </p:txBody>
-            </p:sp>
-          </mc:Fallback>
-        </mc:AlternateContent>
-        <p:cxnSp>
-          <p:nvCxnSpPr>
-            <p:cNvPr id="39" name="曲线连接符 38">
-              <a:extLst>
-                <a:ext uri="{FF2B5EF4-FFF2-40B4-BE49-F238E27FC236}">
-                  <a16:creationId xmlns:a16="http://schemas.microsoft.com/office/drawing/2014/main" id="{47EFDB5D-A7B4-DCDE-6DEB-E09290ED0E54}"/>
-                </a:ext>
-              </a:extLst>
-            </p:cNvPr>
-            <p:cNvCxnSpPr>
-              <a:cxnSpLocks/>
-              <a:stCxn id="38" idx="1"/>
-              <a:endCxn id="26" idx="2"/>
-            </p:cNvCxnSpPr>
-            <p:nvPr/>
-          </p:nvCxnSpPr>
-          <p:spPr>
-            <a:xfrm rot="10800000" flipH="1">
-              <a:off x="6505302" y="3090537"/>
-              <a:ext cx="1114701" cy="1057033"/>
-            </a:xfrm>
-            <a:prstGeom prst="curvedConnector4">
-              <a:avLst>
-                <a:gd name="adj1" fmla="val -20508"/>
-                <a:gd name="adj2" fmla="val 74022"/>
-              </a:avLst>
-            </a:prstGeom>
-            <a:ln>
+                  </m:oMathPara>
+                </a14:m>
+                <a:endParaRPr kumimoji="1" lang="zh-CN" altLang="en-US" b="1" dirty="0">
+                  <a:solidFill>
+                    <a:srgbClr val="FF0000"/>
+                  </a:solidFill>
+                </a:endParaRPr>
+              </a:p>
+            </p:txBody>
+          </p:sp>
+        </mc:Choice>
+        <mc:Fallback>
+          <p:sp>
+            <p:nvSpPr>
+              <p:cNvPr id="26" name="文本框 25">
+                <a:extLst>
+                  <a:ext uri="{FF2B5EF4-FFF2-40B4-BE49-F238E27FC236}">
+                    <a16:creationId xmlns:a16="http://schemas.microsoft.com/office/drawing/2014/main" id="{E312FC32-ADB8-1474-4F26-9F47377E0524}"/>
+                  </a:ext>
+                </a:extLst>
+              </p:cNvPr>
+              <p:cNvSpPr txBox="1">
+                <a:spLocks noRot="1" noChangeAspect="1" noMove="1" noResize="1" noEditPoints="1" noAdjustHandles="1" noChangeArrowheads="1" noChangeShapeType="1" noTextEdit="1"/>
+              </p:cNvSpPr>
+              <p:nvPr/>
+            </p:nvSpPr>
+            <p:spPr>
+              <a:xfrm>
+                <a:off x="7067010" y="3183259"/>
+                <a:ext cx="461554" cy="369332"/>
+              </a:xfrm>
+              <a:prstGeom prst="rect">
+                <a:avLst/>
+              </a:prstGeom>
+              <a:blipFill>
+                <a:blip r:embed="rId13"/>
+                <a:stretch>
+                  <a:fillRect/>
+                </a:stretch>
+              </a:blipFill>
+            </p:spPr>
+            <p:txBody>
+              <a:bodyPr/>
+              <a:lstStyle/>
+              <a:p>
+                <a:r>
+                  <a:rPr lang="zh-CN" altLang="en-US">
+                    <a:noFill/>
+                  </a:rPr>
+                  <a:t> </a:t>
+                </a:r>
+              </a:p>
+            </p:txBody>
+          </p:sp>
+        </mc:Fallback>
+      </mc:AlternateContent>
+      <p:sp>
+        <p:nvSpPr>
+          <p:cNvPr id="27" name="双中括号 26">
+            <a:extLst>
+              <a:ext uri="{FF2B5EF4-FFF2-40B4-BE49-F238E27FC236}">
+                <a16:creationId xmlns:a16="http://schemas.microsoft.com/office/drawing/2014/main" id="{4943CC6A-2EB3-0729-5C38-582C7DFC36D7}"/>
+              </a:ext>
+            </a:extLst>
+          </p:cNvPr>
+          <p:cNvSpPr/>
+          <p:nvPr/>
+        </p:nvSpPr>
+        <p:spPr>
+          <a:xfrm>
+            <a:off x="7547070" y="2438289"/>
+            <a:ext cx="3069770" cy="1466612"/>
+          </a:xfrm>
+          <a:prstGeom prst="bracketPair">
+            <a:avLst>
+              <a:gd name="adj" fmla="val 6116"/>
+            </a:avLst>
+          </a:prstGeom>
+          <a:ln>
+            <a:solidFill>
+              <a:schemeClr val="tx1"/>
+            </a:solidFill>
+          </a:ln>
+        </p:spPr>
+        <p:style>
+          <a:lnRef idx="2">
+            <a:schemeClr val="accent1"/>
+          </a:lnRef>
+          <a:fillRef idx="0">
+            <a:schemeClr val="accent1"/>
+          </a:fillRef>
+          <a:effectRef idx="1">
+            <a:schemeClr val="accent1"/>
+          </a:effectRef>
+          <a:fontRef idx="minor">
+            <a:schemeClr val="tx1"/>
+          </a:fontRef>
+        </p:style>
+        <p:txBody>
+          <a:bodyPr rtlCol="0" anchor="ctr"/>
+          <a:lstStyle/>
+          <a:p>
+            <a:pPr algn="ctr"/>
+            <a:endParaRPr kumimoji="1" lang="zh-CN" altLang="en-US"/>
+          </a:p>
+        </p:txBody>
+      </p:sp>
+      <p:sp>
+        <p:nvSpPr>
+          <p:cNvPr id="30" name="矩形 29">
+            <a:extLst>
+              <a:ext uri="{FF2B5EF4-FFF2-40B4-BE49-F238E27FC236}">
+                <a16:creationId xmlns:a16="http://schemas.microsoft.com/office/drawing/2014/main" id="{2FC989D1-6446-8FF0-A9F0-863EDC95FE08}"/>
+              </a:ext>
+            </a:extLst>
+          </p:cNvPr>
+          <p:cNvSpPr/>
+          <p:nvPr/>
+        </p:nvSpPr>
+        <p:spPr>
+          <a:xfrm>
+            <a:off x="5131529" y="3283017"/>
+            <a:ext cx="748937" cy="169817"/>
+          </a:xfrm>
+          <a:prstGeom prst="rect">
+            <a:avLst/>
+          </a:prstGeom>
+          <a:solidFill>
+            <a:srgbClr val="92D050"/>
+          </a:solidFill>
+          <a:ln>
+            <a:solidFill>
+              <a:schemeClr val="tx1">
+                <a:lumMod val="95000"/>
+                <a:lumOff val="5000"/>
+              </a:schemeClr>
+            </a:solidFill>
+          </a:ln>
+        </p:spPr>
+        <p:style>
+          <a:lnRef idx="2">
+            <a:schemeClr val="accent1">
+              <a:shade val="15000"/>
+            </a:schemeClr>
+          </a:lnRef>
+          <a:fillRef idx="1">
+            <a:schemeClr val="accent1"/>
+          </a:fillRef>
+          <a:effectRef idx="0">
+            <a:schemeClr val="accent1"/>
+          </a:effectRef>
+          <a:fontRef idx="minor">
+            <a:schemeClr val="lt1"/>
+          </a:fontRef>
+        </p:style>
+        <p:txBody>
+          <a:bodyPr rtlCol="0" anchor="ctr"/>
+          <a:lstStyle/>
+          <a:p>
+            <a:pPr algn="ctr"/>
+            <a:endParaRPr kumimoji="1" lang="zh-CN" altLang="en-US" dirty="0">
               <a:solidFill>
-                <a:schemeClr val="tx1">
-                  <a:lumMod val="50000"/>
-                  <a:lumOff val="50000"/>
-                </a:schemeClr>
+                <a:schemeClr val="tx1"/>
               </a:solidFill>
-              <a:tailEnd type="triangle" w="med" len="lg"/>
-            </a:ln>
-          </p:spPr>
-          <p:style>
-            <a:lnRef idx="2">
-              <a:schemeClr val="accent1"/>
-            </a:lnRef>
-            <a:fillRef idx="0">
-              <a:schemeClr val="accent1"/>
-            </a:fillRef>
-            <a:effectRef idx="1">
-              <a:schemeClr val="accent1"/>
-            </a:effectRef>
-            <a:fontRef idx="minor">
-              <a:schemeClr val="tx1"/>
-            </a:fontRef>
-          </p:style>
-        </p:cxnSp>
-        <p:cxnSp>
-          <p:nvCxnSpPr>
-            <p:cNvPr id="43" name="曲线连接符 42">
-              <a:extLst>
-                <a:ext uri="{FF2B5EF4-FFF2-40B4-BE49-F238E27FC236}">
-                  <a16:creationId xmlns:a16="http://schemas.microsoft.com/office/drawing/2014/main" id="{3072DB1A-9063-6E3C-D5A9-ECE0F1F959E5}"/>
-                </a:ext>
-              </a:extLst>
-            </p:cNvPr>
-            <p:cNvCxnSpPr>
-              <a:cxnSpLocks/>
-              <a:stCxn id="38" idx="3"/>
-              <a:endCxn id="21" idx="2"/>
-            </p:cNvCxnSpPr>
-            <p:nvPr/>
-          </p:nvCxnSpPr>
-          <p:spPr>
-            <a:xfrm flipV="1">
-              <a:off x="8473440" y="3090536"/>
-              <a:ext cx="342908" cy="1057033"/>
-            </a:xfrm>
-            <a:prstGeom prst="curvedConnector2">
-              <a:avLst/>
-            </a:prstGeom>
-            <a:ln>
-              <a:solidFill>
-                <a:schemeClr val="tx1">
-                  <a:lumMod val="50000"/>
-                  <a:lumOff val="50000"/>
-                </a:schemeClr>
-              </a:solidFill>
-              <a:tailEnd type="triangle" w="med" len="lg"/>
-            </a:ln>
-          </p:spPr>
-          <p:style>
-            <a:lnRef idx="2">
-              <a:schemeClr val="accent1"/>
-            </a:lnRef>
-            <a:fillRef idx="0">
-              <a:schemeClr val="accent1"/>
-            </a:fillRef>
-            <a:effectRef idx="1">
-              <a:schemeClr val="accent1"/>
-            </a:effectRef>
-            <a:fontRef idx="minor">
-              <a:schemeClr val="tx1"/>
-            </a:fontRef>
-          </p:style>
-        </p:cxnSp>
-      </p:grpSp>
+              <a:latin typeface="Calibri" panose="020F0502020204030204" pitchFamily="34" charset="0"/>
+              <a:cs typeface="Calibri" panose="020F0502020204030204" pitchFamily="34" charset="0"/>
+            </a:endParaRPr>
+          </a:p>
+        </p:txBody>
+      </p:sp>
+      <mc:AlternateContent xmlns:mc="http://schemas.openxmlformats.org/markup-compatibility/2006">
+        <mc:Choice xmlns:a14="http://schemas.microsoft.com/office/drawing/2010/main" Requires="a14">
+          <p:sp>
+            <p:nvSpPr>
+              <p:cNvPr id="31" name="文本框 30">
+                <a:extLst>
+                  <a:ext uri="{FF2B5EF4-FFF2-40B4-BE49-F238E27FC236}">
+                    <a16:creationId xmlns:a16="http://schemas.microsoft.com/office/drawing/2014/main" id="{CE2A9B37-957B-7212-8680-F7AB603E39F0}"/>
+                  </a:ext>
+                </a:extLst>
+              </p:cNvPr>
+              <p:cNvSpPr txBox="1"/>
+              <p:nvPr/>
+            </p:nvSpPr>
+            <p:spPr>
+              <a:xfrm>
+                <a:off x="5252361" y="2855988"/>
+                <a:ext cx="461554" cy="369332"/>
+              </a:xfrm>
+              <a:prstGeom prst="rect">
+                <a:avLst/>
+              </a:prstGeom>
+              <a:noFill/>
+            </p:spPr>
+            <p:txBody>
+              <a:bodyPr wrap="square" rtlCol="0">
+                <a:spAutoFit/>
+              </a:bodyPr>
+              <a:lstStyle/>
+              <a:p>
+                <a:pPr/>
+                <a14:m>
+                  <m:oMathPara xmlns:m="http://schemas.openxmlformats.org/officeDocument/2006/math">
+                    <m:oMathParaPr>
+                      <m:jc m:val="centerGroup"/>
+                    </m:oMathParaPr>
+                    <m:oMath xmlns:m="http://schemas.openxmlformats.org/officeDocument/2006/math">
+                      <m:sSub>
+                        <m:sSubPr>
+                          <m:ctrlPr>
+                            <a:rPr kumimoji="1" lang="en-US" altLang="zh-CN" b="0" i="1" dirty="0" smtClean="0">
+                              <a:latin typeface="Cambria Math" panose="02040503050406030204" pitchFamily="18" charset="0"/>
+                            </a:rPr>
+                          </m:ctrlPr>
+                        </m:sSubPr>
+                        <m:e>
+                          <m:r>
+                            <a:rPr kumimoji="1" lang="en-US" altLang="zh-CN" b="0" i="1" dirty="0" smtClean="0">
+                              <a:latin typeface="Cambria Math" panose="02040503050406030204" pitchFamily="18" charset="0"/>
+                            </a:rPr>
+                            <m:t>𝑜</m:t>
+                          </m:r>
+                        </m:e>
+                        <m:sub>
+                          <m:r>
+                            <a:rPr kumimoji="1" lang="en-US" altLang="zh-CN" b="0" i="1" dirty="0" smtClean="0">
+                              <a:latin typeface="Cambria Math" panose="02040503050406030204" pitchFamily="18" charset="0"/>
+                            </a:rPr>
+                            <m:t>𝑖</m:t>
+                          </m:r>
+                        </m:sub>
+                      </m:sSub>
+                      <m:r>
+                        <a:rPr kumimoji="1" lang="zh-CN" altLang="en-US" i="1" dirty="0" smtClean="0">
+                          <a:latin typeface="Cambria Math" panose="02040503050406030204" pitchFamily="18" charset="0"/>
+                        </a:rPr>
+                        <m:t> </m:t>
+                      </m:r>
+                    </m:oMath>
+                  </m:oMathPara>
+                </a14:m>
+                <a:endParaRPr kumimoji="1" lang="zh-CN" altLang="en-US" dirty="0"/>
+              </a:p>
+            </p:txBody>
+          </p:sp>
+        </mc:Choice>
+        <mc:Fallback>
+          <p:sp>
+            <p:nvSpPr>
+              <p:cNvPr id="31" name="文本框 30">
+                <a:extLst>
+                  <a:ext uri="{FF2B5EF4-FFF2-40B4-BE49-F238E27FC236}">
+                    <a16:creationId xmlns:a16="http://schemas.microsoft.com/office/drawing/2014/main" id="{CE2A9B37-957B-7212-8680-F7AB603E39F0}"/>
+                  </a:ext>
+                </a:extLst>
+              </p:cNvPr>
+              <p:cNvSpPr txBox="1">
+                <a:spLocks noRot="1" noChangeAspect="1" noMove="1" noResize="1" noEditPoints="1" noAdjustHandles="1" noChangeArrowheads="1" noChangeShapeType="1" noTextEdit="1"/>
+              </p:cNvSpPr>
+              <p:nvPr/>
+            </p:nvSpPr>
+            <p:spPr>
+              <a:xfrm>
+                <a:off x="5252361" y="2855988"/>
+                <a:ext cx="461554" cy="369332"/>
+              </a:xfrm>
+              <a:prstGeom prst="rect">
+                <a:avLst/>
+              </a:prstGeom>
+              <a:blipFill>
+                <a:blip r:embed="rId16"/>
+                <a:stretch>
+                  <a:fillRect r="-2703" b="-17241"/>
+                </a:stretch>
+              </a:blipFill>
+            </p:spPr>
+            <p:txBody>
+              <a:bodyPr/>
+              <a:lstStyle/>
+              <a:p>
+                <a:r>
+                  <a:rPr lang="zh-CN" altLang="en-US">
+                    <a:noFill/>
+                  </a:rPr>
+                  <a:t> </a:t>
+                </a:r>
+              </a:p>
+            </p:txBody>
+          </p:sp>
+        </mc:Fallback>
+      </mc:AlternateContent>
+      <mc:AlternateContent xmlns:mc="http://schemas.openxmlformats.org/markup-compatibility/2006">
+        <mc:Choice xmlns:a14="http://schemas.microsoft.com/office/drawing/2010/main" Requires="a14">
+          <p:sp>
+            <p:nvSpPr>
+              <p:cNvPr id="32" name="文本框 31">
+                <a:extLst>
+                  <a:ext uri="{FF2B5EF4-FFF2-40B4-BE49-F238E27FC236}">
+                    <a16:creationId xmlns:a16="http://schemas.microsoft.com/office/drawing/2014/main" id="{462403DE-A227-FE15-9355-43797A2BB5BF}"/>
+                  </a:ext>
+                </a:extLst>
+              </p:cNvPr>
+              <p:cNvSpPr txBox="1"/>
+              <p:nvPr/>
+            </p:nvSpPr>
+            <p:spPr>
+              <a:xfrm>
+                <a:off x="5869581" y="3183259"/>
+                <a:ext cx="461554" cy="369332"/>
+              </a:xfrm>
+              <a:prstGeom prst="rect">
+                <a:avLst/>
+              </a:prstGeom>
+              <a:noFill/>
+            </p:spPr>
+            <p:txBody>
+              <a:bodyPr wrap="square" rtlCol="0">
+                <a:spAutoFit/>
+              </a:bodyPr>
+              <a:lstStyle/>
+              <a:p>
+                <a:pPr/>
+                <a14:m>
+                  <m:oMathPara xmlns:m="http://schemas.openxmlformats.org/officeDocument/2006/math">
+                    <m:oMathParaPr>
+                      <m:jc m:val="centerGroup"/>
+                    </m:oMathParaPr>
+                    <m:oMath xmlns:m="http://schemas.openxmlformats.org/officeDocument/2006/math">
+                      <m:r>
+                        <a:rPr kumimoji="1" lang="en-US" altLang="zh-CN" b="0" i="1" dirty="0" smtClean="0">
+                          <a:latin typeface="Cambria Math" panose="02040503050406030204" pitchFamily="18" charset="0"/>
+                        </a:rPr>
+                        <m:t>=</m:t>
+                      </m:r>
+                    </m:oMath>
+                  </m:oMathPara>
+                </a14:m>
+                <a:endParaRPr kumimoji="1" lang="zh-CN" altLang="en-US" dirty="0"/>
+              </a:p>
+            </p:txBody>
+          </p:sp>
+        </mc:Choice>
+        <mc:Fallback>
+          <p:sp>
+            <p:nvSpPr>
+              <p:cNvPr id="32" name="文本框 31">
+                <a:extLst>
+                  <a:ext uri="{FF2B5EF4-FFF2-40B4-BE49-F238E27FC236}">
+                    <a16:creationId xmlns:a16="http://schemas.microsoft.com/office/drawing/2014/main" id="{462403DE-A227-FE15-9355-43797A2BB5BF}"/>
+                  </a:ext>
+                </a:extLst>
+              </p:cNvPr>
+              <p:cNvSpPr txBox="1">
+                <a:spLocks noRot="1" noChangeAspect="1" noMove="1" noResize="1" noEditPoints="1" noAdjustHandles="1" noChangeArrowheads="1" noChangeShapeType="1" noTextEdit="1"/>
+              </p:cNvSpPr>
+              <p:nvPr/>
+            </p:nvSpPr>
+            <p:spPr>
+              <a:xfrm>
+                <a:off x="5869581" y="3183259"/>
+                <a:ext cx="461554" cy="369332"/>
+              </a:xfrm>
+              <a:prstGeom prst="rect">
+                <a:avLst/>
+              </a:prstGeom>
+              <a:blipFill>
+                <a:blip r:embed="rId17"/>
+                <a:stretch>
+                  <a:fillRect/>
+                </a:stretch>
+              </a:blipFill>
+            </p:spPr>
+            <p:txBody>
+              <a:bodyPr/>
+              <a:lstStyle/>
+              <a:p>
+                <a:r>
+                  <a:rPr lang="zh-CN" altLang="en-US">
+                    <a:noFill/>
+                  </a:rPr>
+                  <a:t> </a:t>
+                </a:r>
+              </a:p>
+            </p:txBody>
+          </p:sp>
+        </mc:Fallback>
+      </mc:AlternateContent>
+      <p:sp>
+        <p:nvSpPr>
+          <p:cNvPr id="35" name="文本框 34">
+            <a:extLst>
+              <a:ext uri="{FF2B5EF4-FFF2-40B4-BE49-F238E27FC236}">
+                <a16:creationId xmlns:a16="http://schemas.microsoft.com/office/drawing/2014/main" id="{2DA6319B-B7FA-549F-AA21-61518BCB8F26}"/>
+              </a:ext>
+            </a:extLst>
+          </p:cNvPr>
+          <p:cNvSpPr txBox="1"/>
+          <p:nvPr/>
+        </p:nvSpPr>
+        <p:spPr>
+          <a:xfrm>
+            <a:off x="6958151" y="1612259"/>
+            <a:ext cx="3021869" cy="646331"/>
+          </a:xfrm>
+          <a:prstGeom prst="rect">
+            <a:avLst/>
+          </a:prstGeom>
+          <a:noFill/>
+        </p:spPr>
+        <p:txBody>
+          <a:bodyPr wrap="square" rtlCol="0">
+            <a:spAutoFit/>
+          </a:bodyPr>
+          <a:lstStyle/>
+          <a:p>
+            <a:r>
+              <a:rPr kumimoji="1" lang="zh-CN" altLang="en-US" sz="1200" dirty="0">
+                <a:latin typeface="Microsoft YaHei" panose="020B0503020204020204" pitchFamily="34" charset="-122"/>
+                <a:ea typeface="Microsoft YaHei" panose="020B0503020204020204" pitchFamily="34" charset="-122"/>
+              </a:rPr>
+              <a:t>依赖于输入对</a:t>
+            </a:r>
+            <a:r>
+              <a:rPr kumimoji="1" lang="en-US" altLang="zh-CN" sz="1200" dirty="0">
+                <a:latin typeface="Microsoft YaHei" panose="020B0503020204020204" pitchFamily="34" charset="-122"/>
+                <a:ea typeface="Microsoft YaHei" panose="020B0503020204020204" pitchFamily="34" charset="-122"/>
+              </a:rPr>
+              <a:t>RNN</a:t>
+            </a:r>
+            <a:r>
+              <a:rPr kumimoji="1" lang="zh-CN" altLang="en-US" sz="1200" dirty="0">
+                <a:latin typeface="Microsoft YaHei" panose="020B0503020204020204" pitchFamily="34" charset="-122"/>
+                <a:ea typeface="Microsoft YaHei" panose="020B0503020204020204" pitchFamily="34" charset="-122"/>
+              </a:rPr>
+              <a:t>的历史状态进行衰减，这里和</a:t>
+            </a:r>
+            <a:r>
+              <a:rPr kumimoji="1" lang="en-US" altLang="zh-CN" sz="1200" dirty="0">
+                <a:latin typeface="Microsoft YaHei" panose="020B0503020204020204" pitchFamily="34" charset="-122"/>
+                <a:ea typeface="Microsoft YaHei" panose="020B0503020204020204" pitchFamily="34" charset="-122"/>
+              </a:rPr>
+              <a:t>mamba</a:t>
+            </a:r>
+            <a:r>
+              <a:rPr kumimoji="1" lang="zh-CN" altLang="en-US" sz="1200" dirty="0">
+                <a:latin typeface="Microsoft YaHei" panose="020B0503020204020204" pitchFamily="34" charset="-122"/>
+                <a:ea typeface="Microsoft YaHei" panose="020B0503020204020204" pitchFamily="34" charset="-122"/>
+              </a:rPr>
+              <a:t>很类似，通过一个双层</a:t>
+            </a:r>
+            <a:r>
+              <a:rPr kumimoji="1" lang="en-US" altLang="zh-CN" sz="1200" dirty="0">
+                <a:latin typeface="Microsoft YaHei" panose="020B0503020204020204" pitchFamily="34" charset="-122"/>
+                <a:ea typeface="Microsoft YaHei" panose="020B0503020204020204" pitchFamily="34" charset="-122"/>
+              </a:rPr>
+              <a:t>DNN</a:t>
+            </a:r>
+            <a:r>
+              <a:rPr kumimoji="1" lang="zh-CN" altLang="en-US" sz="1200" dirty="0">
+                <a:latin typeface="Microsoft YaHei" panose="020B0503020204020204" pitchFamily="34" charset="-122"/>
+                <a:ea typeface="Microsoft YaHei" panose="020B0503020204020204" pitchFamily="34" charset="-122"/>
+              </a:rPr>
+              <a:t>学习得到。</a:t>
+            </a:r>
+          </a:p>
+        </p:txBody>
+      </p:sp>
+      <p:cxnSp>
+        <p:nvCxnSpPr>
+          <p:cNvPr id="37" name="曲线连接符 36">
+            <a:extLst>
+              <a:ext uri="{FF2B5EF4-FFF2-40B4-BE49-F238E27FC236}">
+                <a16:creationId xmlns:a16="http://schemas.microsoft.com/office/drawing/2014/main" id="{1F0030D2-7D57-5192-E7A2-06AADDE7B320}"/>
+              </a:ext>
+            </a:extLst>
+          </p:cNvPr>
+          <p:cNvCxnSpPr>
+            <a:cxnSpLocks/>
+            <a:stCxn id="35" idx="2"/>
+            <a:endCxn id="20" idx="0"/>
+          </p:cNvCxnSpPr>
+          <p:nvPr/>
+        </p:nvCxnSpPr>
+        <p:spPr>
+          <a:xfrm rot="5400000">
+            <a:off x="7735078" y="2259448"/>
+            <a:ext cx="734866" cy="733150"/>
+          </a:xfrm>
+          <a:prstGeom prst="curvedConnector3">
+            <a:avLst/>
+          </a:prstGeom>
+          <a:ln>
+            <a:solidFill>
+              <a:schemeClr val="tx1">
+                <a:lumMod val="50000"/>
+                <a:lumOff val="50000"/>
+              </a:schemeClr>
+            </a:solidFill>
+            <a:tailEnd type="triangle" w="med" len="lg"/>
+          </a:ln>
+        </p:spPr>
+        <p:style>
+          <a:lnRef idx="2">
+            <a:schemeClr val="accent1"/>
+          </a:lnRef>
+          <a:fillRef idx="0">
+            <a:schemeClr val="accent1"/>
+          </a:fillRef>
+          <a:effectRef idx="1">
+            <a:schemeClr val="accent1"/>
+          </a:effectRef>
+          <a:fontRef idx="minor">
+            <a:schemeClr val="tx1"/>
+          </a:fontRef>
+        </p:style>
+      </p:cxnSp>
+      <mc:AlternateContent xmlns:mc="http://schemas.openxmlformats.org/markup-compatibility/2006">
+        <mc:Choice xmlns:a14="http://schemas.microsoft.com/office/drawing/2010/main" Requires="a14">
+          <p:sp>
+            <p:nvSpPr>
+              <p:cNvPr id="38" name="文本框 37">
+                <a:extLst>
+                  <a:ext uri="{FF2B5EF4-FFF2-40B4-BE49-F238E27FC236}">
+                    <a16:creationId xmlns:a16="http://schemas.microsoft.com/office/drawing/2014/main" id="{35F538FA-8CF4-749E-0323-8CD3FFB1484A}"/>
+                  </a:ext>
+                </a:extLst>
+              </p:cNvPr>
+              <p:cNvSpPr txBox="1"/>
+              <p:nvPr/>
+            </p:nvSpPr>
+            <p:spPr>
+              <a:xfrm>
+                <a:off x="5731334" y="4145840"/>
+                <a:ext cx="2829192" cy="646331"/>
+              </a:xfrm>
+              <a:prstGeom prst="rect">
+                <a:avLst/>
+              </a:prstGeom>
+              <a:noFill/>
+            </p:spPr>
+            <p:txBody>
+              <a:bodyPr wrap="square" rtlCol="0">
+                <a:spAutoFit/>
+              </a:bodyPr>
+              <a:lstStyle/>
+              <a:p>
+                <a:r>
+                  <a:rPr kumimoji="1" lang="zh-CN" altLang="en-US" sz="1200" dirty="0">
+                    <a:latin typeface="Microsoft YaHei" panose="020B0503020204020204" pitchFamily="34" charset="-122"/>
+                    <a:ea typeface="Microsoft YaHei" panose="020B0503020204020204" pitchFamily="34" charset="-122"/>
+                  </a:rPr>
+                  <a:t>这个图里面</a:t>
+                </a:r>
+                <a:r>
+                  <a:rPr kumimoji="1" lang="en-US" altLang="zh-CN" sz="1200" dirty="0">
+                    <a:latin typeface="Microsoft YaHei" panose="020B0503020204020204" pitchFamily="34" charset="-122"/>
+                    <a:ea typeface="Microsoft YaHei" panose="020B0503020204020204" pitchFamily="34" charset="-122"/>
+                  </a:rPr>
+                  <a:t>plot</a:t>
+                </a:r>
+                <a:r>
+                  <a:rPr kumimoji="1" lang="zh-CN" altLang="en-US" sz="1200" dirty="0">
+                    <a:latin typeface="Microsoft YaHei" panose="020B0503020204020204" pitchFamily="34" charset="-122"/>
+                    <a:ea typeface="Microsoft YaHei" panose="020B0503020204020204" pitchFamily="34" charset="-122"/>
+                  </a:rPr>
+                  <a:t>的是向量形式的单个</a:t>
+                </a:r>
+                <a:r>
+                  <a:rPr kumimoji="1" lang="en-US" altLang="zh-CN" sz="1200" dirty="0">
+                    <a:latin typeface="Microsoft YaHei" panose="020B0503020204020204" pitchFamily="34" charset="-122"/>
+                    <a:ea typeface="Microsoft YaHei" panose="020B0503020204020204" pitchFamily="34" charset="-122"/>
+                  </a:rPr>
+                  <a:t>query/</a:t>
+                </a:r>
+                <a:r>
+                  <a:rPr kumimoji="1" lang="zh-CN" altLang="en-US" sz="1200" dirty="0">
+                    <a:latin typeface="Microsoft YaHei" panose="020B0503020204020204" pitchFamily="34" charset="-122"/>
+                    <a:ea typeface="Microsoft YaHei" panose="020B0503020204020204" pitchFamily="34" charset="-122"/>
+                  </a:rPr>
+                  <a:t> </a:t>
+                </a:r>
+                <a:r>
+                  <a:rPr kumimoji="1" lang="en-US" altLang="zh-CN" sz="1200" dirty="0">
+                    <a:latin typeface="Microsoft YaHei" panose="020B0503020204020204" pitchFamily="34" charset="-122"/>
+                    <a:ea typeface="Microsoft YaHei" panose="020B0503020204020204" pitchFamily="34" charset="-122"/>
+                  </a:rPr>
+                  <a:t>key/</a:t>
+                </a:r>
+                <a:r>
+                  <a:rPr kumimoji="1" lang="zh-CN" altLang="en-US" sz="1200" dirty="0">
+                    <a:latin typeface="Microsoft YaHei" panose="020B0503020204020204" pitchFamily="34" charset="-122"/>
+                    <a:ea typeface="Microsoft YaHei" panose="020B0503020204020204" pitchFamily="34" charset="-122"/>
+                  </a:rPr>
+                  <a:t> </a:t>
+                </a:r>
+                <a:r>
+                  <a:rPr kumimoji="1" lang="en-US" altLang="zh-CN" sz="1200" dirty="0">
+                    <a:latin typeface="Microsoft YaHei" panose="020B0503020204020204" pitchFamily="34" charset="-122"/>
+                    <a:ea typeface="Microsoft YaHei" panose="020B0503020204020204" pitchFamily="34" charset="-122"/>
+                  </a:rPr>
+                  <a:t>value</a:t>
+                </a:r>
+                <a:r>
+                  <a:rPr kumimoji="1" lang="zh-CN" altLang="en-US" sz="1200" dirty="0">
+                    <a:latin typeface="Microsoft YaHei" panose="020B0503020204020204" pitchFamily="34" charset="-122"/>
+                    <a:ea typeface="Microsoft YaHei" panose="020B0503020204020204" pitchFamily="34" charset="-122"/>
+                  </a:rPr>
+                  <a:t>进行计算的过程，这里的 </a:t>
+                </a:r>
+                <a14:m>
+                  <m:oMath xmlns:m="http://schemas.openxmlformats.org/officeDocument/2006/math">
+                    <m:r>
+                      <a:rPr kumimoji="1" lang="zh-CN" altLang="en-US" sz="1200" b="1" i="1" smtClean="0">
+                        <a:solidFill>
+                          <a:srgbClr val="FF0000"/>
+                        </a:solidFill>
+                        <a:latin typeface="Cambria Math" panose="02040503050406030204" pitchFamily="18" charset="0"/>
+                        <a:ea typeface="Microsoft YaHei" panose="020B0503020204020204" pitchFamily="34" charset="-122"/>
+                      </a:rPr>
+                      <m:t>∗</m:t>
+                    </m:r>
+                  </m:oMath>
+                </a14:m>
+                <a:r>
+                  <a:rPr kumimoji="1" lang="zh-CN" altLang="en-US" sz="1200" dirty="0">
+                    <a:latin typeface="Microsoft YaHei" panose="020B0503020204020204" pitchFamily="34" charset="-122"/>
+                    <a:ea typeface="Microsoft YaHei" panose="020B0503020204020204" pitchFamily="34" charset="-122"/>
+                  </a:rPr>
+                  <a:t> 的数据并行化之后都是矩阵乘。</a:t>
+                </a:r>
+              </a:p>
+            </p:txBody>
+          </p:sp>
+        </mc:Choice>
+        <mc:Fallback>
+          <p:sp>
+            <p:nvSpPr>
+              <p:cNvPr id="38" name="文本框 37">
+                <a:extLst>
+                  <a:ext uri="{FF2B5EF4-FFF2-40B4-BE49-F238E27FC236}">
+                    <a16:creationId xmlns:a16="http://schemas.microsoft.com/office/drawing/2014/main" id="{35F538FA-8CF4-749E-0323-8CD3FFB1484A}"/>
+                  </a:ext>
+                </a:extLst>
+              </p:cNvPr>
+              <p:cNvSpPr txBox="1">
+                <a:spLocks noRot="1" noChangeAspect="1" noMove="1" noResize="1" noEditPoints="1" noAdjustHandles="1" noChangeArrowheads="1" noChangeShapeType="1" noTextEdit="1"/>
+              </p:cNvSpPr>
+              <p:nvPr/>
+            </p:nvSpPr>
+            <p:spPr>
+              <a:xfrm>
+                <a:off x="5731334" y="4145840"/>
+                <a:ext cx="2829192" cy="646331"/>
+              </a:xfrm>
+              <a:prstGeom prst="rect">
+                <a:avLst/>
+              </a:prstGeom>
+              <a:blipFill>
+                <a:blip r:embed="rId18"/>
+                <a:stretch>
+                  <a:fillRect b="-5769"/>
+                </a:stretch>
+              </a:blipFill>
+            </p:spPr>
+            <p:txBody>
+              <a:bodyPr/>
+              <a:lstStyle/>
+              <a:p>
+                <a:r>
+                  <a:rPr lang="zh-CN" altLang="en-US">
+                    <a:noFill/>
+                  </a:rPr>
+                  <a:t> </a:t>
+                </a:r>
+              </a:p>
+            </p:txBody>
+          </p:sp>
+        </mc:Fallback>
+      </mc:AlternateContent>
+      <p:cxnSp>
+        <p:nvCxnSpPr>
+          <p:cNvPr id="39" name="曲线连接符 38">
+            <a:extLst>
+              <a:ext uri="{FF2B5EF4-FFF2-40B4-BE49-F238E27FC236}">
+                <a16:creationId xmlns:a16="http://schemas.microsoft.com/office/drawing/2014/main" id="{47EFDB5D-A7B4-DCDE-6DEB-E09290ED0E54}"/>
+              </a:ext>
+            </a:extLst>
+          </p:cNvPr>
+          <p:cNvCxnSpPr>
+            <a:cxnSpLocks/>
+            <a:stCxn id="38" idx="1"/>
+            <a:endCxn id="26" idx="2"/>
+          </p:cNvCxnSpPr>
+          <p:nvPr/>
+        </p:nvCxnSpPr>
+        <p:spPr>
+          <a:xfrm rot="10800000" flipH="1">
+            <a:off x="5731333" y="3552592"/>
+            <a:ext cx="1566453" cy="916415"/>
+          </a:xfrm>
+          <a:prstGeom prst="curvedConnector4">
+            <a:avLst>
+              <a:gd name="adj1" fmla="val -14593"/>
+              <a:gd name="adj2" fmla="val 67632"/>
+            </a:avLst>
+          </a:prstGeom>
+          <a:ln>
+            <a:solidFill>
+              <a:schemeClr val="tx1">
+                <a:lumMod val="50000"/>
+                <a:lumOff val="50000"/>
+              </a:schemeClr>
+            </a:solidFill>
+            <a:tailEnd type="triangle" w="med" len="lg"/>
+          </a:ln>
+        </p:spPr>
+        <p:style>
+          <a:lnRef idx="2">
+            <a:schemeClr val="accent1"/>
+          </a:lnRef>
+          <a:fillRef idx="0">
+            <a:schemeClr val="accent1"/>
+          </a:fillRef>
+          <a:effectRef idx="1">
+            <a:schemeClr val="accent1"/>
+          </a:effectRef>
+          <a:fontRef idx="minor">
+            <a:schemeClr val="tx1"/>
+          </a:fontRef>
+        </p:style>
+      </p:cxnSp>
+      <p:cxnSp>
+        <p:nvCxnSpPr>
+          <p:cNvPr id="43" name="曲线连接符 42">
+            <a:extLst>
+              <a:ext uri="{FF2B5EF4-FFF2-40B4-BE49-F238E27FC236}">
+                <a16:creationId xmlns:a16="http://schemas.microsoft.com/office/drawing/2014/main" id="{3072DB1A-9063-6E3C-D5A9-ECE0F1F959E5}"/>
+              </a:ext>
+            </a:extLst>
+          </p:cNvPr>
+          <p:cNvCxnSpPr>
+            <a:cxnSpLocks/>
+            <a:stCxn id="38" idx="3"/>
+            <a:endCxn id="21" idx="2"/>
+          </p:cNvCxnSpPr>
+          <p:nvPr/>
+        </p:nvCxnSpPr>
+        <p:spPr>
+          <a:xfrm flipH="1" flipV="1">
+            <a:off x="7919361" y="3552591"/>
+            <a:ext cx="641165" cy="916415"/>
+          </a:xfrm>
+          <a:prstGeom prst="curvedConnector4">
+            <a:avLst>
+              <a:gd name="adj1" fmla="val -35654"/>
+              <a:gd name="adj2" fmla="val 67632"/>
+            </a:avLst>
+          </a:prstGeom>
+          <a:ln>
+            <a:solidFill>
+              <a:schemeClr val="tx1">
+                <a:lumMod val="50000"/>
+                <a:lumOff val="50000"/>
+              </a:schemeClr>
+            </a:solidFill>
+            <a:tailEnd type="triangle" w="med" len="lg"/>
+          </a:ln>
+        </p:spPr>
+        <p:style>
+          <a:lnRef idx="2">
+            <a:schemeClr val="accent1"/>
+          </a:lnRef>
+          <a:fillRef idx="0">
+            <a:schemeClr val="accent1"/>
+          </a:fillRef>
+          <a:effectRef idx="1">
+            <a:schemeClr val="accent1"/>
+          </a:effectRef>
+          <a:fontRef idx="minor">
+            <a:schemeClr val="tx1"/>
+          </a:fontRef>
+        </p:style>
+      </p:cxnSp>
+      <mc:AlternateContent xmlns:mc="http://schemas.openxmlformats.org/markup-compatibility/2006">
+        <mc:Choice xmlns:a14="http://schemas.microsoft.com/office/drawing/2010/main" Requires="a14">
+          <p:sp>
+            <p:nvSpPr>
+              <p:cNvPr id="4" name="文本框 3">
+                <a:extLst>
+                  <a:ext uri="{FF2B5EF4-FFF2-40B4-BE49-F238E27FC236}">
+                    <a16:creationId xmlns:a16="http://schemas.microsoft.com/office/drawing/2014/main" id="{6473274F-A0DF-6C0B-1DF8-B7B923012086}"/>
+                  </a:ext>
+                </a:extLst>
+              </p:cNvPr>
+              <p:cNvSpPr txBox="1"/>
+              <p:nvPr/>
+            </p:nvSpPr>
+            <p:spPr>
+              <a:xfrm>
+                <a:off x="7450177" y="3672732"/>
+                <a:ext cx="708649" cy="369332"/>
+              </a:xfrm>
+              <a:prstGeom prst="rect">
+                <a:avLst/>
+              </a:prstGeom>
+              <a:noFill/>
+            </p:spPr>
+            <p:txBody>
+              <a:bodyPr wrap="square">
+                <a:spAutoFit/>
+              </a:bodyPr>
+              <a:lstStyle/>
+              <a:p>
+                <a:pPr algn="ctr"/>
+                <a14:m>
+                  <m:oMathPara xmlns:m="http://schemas.openxmlformats.org/officeDocument/2006/math">
+                    <m:oMathParaPr>
+                      <m:jc m:val="centerGroup"/>
+                    </m:oMathParaPr>
+                    <m:oMath xmlns:m="http://schemas.openxmlformats.org/officeDocument/2006/math">
+                      <m:r>
+                        <a:rPr kumimoji="1" lang="en-US" altLang="zh-CN" sz="1800" b="0" i="1" smtClean="0">
+                          <a:solidFill>
+                            <a:schemeClr val="tx1"/>
+                          </a:solidFill>
+                          <a:latin typeface="Cambria Math" panose="02040503050406030204" pitchFamily="18" charset="0"/>
+                          <a:cs typeface="Calibri" panose="020F0502020204030204" pitchFamily="34" charset="0"/>
+                        </a:rPr>
+                        <m:t>𝑔</m:t>
+                      </m:r>
+                      <m:sSub>
+                        <m:sSubPr>
+                          <m:ctrlPr>
+                            <a:rPr kumimoji="1" lang="en-US" altLang="zh-CN" sz="1800" b="0" i="1" smtClean="0">
+                              <a:solidFill>
+                                <a:schemeClr val="tx1"/>
+                              </a:solidFill>
+                              <a:latin typeface="Cambria Math" panose="02040503050406030204" pitchFamily="18" charset="0"/>
+                              <a:cs typeface="Calibri" panose="020F0502020204030204" pitchFamily="34" charset="0"/>
+                            </a:rPr>
+                          </m:ctrlPr>
+                        </m:sSubPr>
+                        <m:e>
+                          <m:r>
+                            <a:rPr kumimoji="1" lang="en-US" altLang="zh-CN" sz="1800" b="0" i="1" smtClean="0">
+                              <a:solidFill>
+                                <a:schemeClr val="tx1"/>
+                              </a:solidFill>
+                              <a:latin typeface="Cambria Math" panose="02040503050406030204" pitchFamily="18" charset="0"/>
+                              <a:cs typeface="Calibri" panose="020F0502020204030204" pitchFamily="34" charset="0"/>
+                            </a:rPr>
+                            <m:t>𝑘</m:t>
+                          </m:r>
+                        </m:e>
+                        <m:sub>
+                          <m:r>
+                            <a:rPr kumimoji="1" lang="en-US" altLang="zh-CN" sz="1800" b="0" i="1" smtClean="0">
+                              <a:solidFill>
+                                <a:schemeClr val="tx1"/>
+                              </a:solidFill>
+                              <a:latin typeface="Cambria Math" panose="02040503050406030204" pitchFamily="18" charset="0"/>
+                              <a:cs typeface="Calibri" panose="020F0502020204030204" pitchFamily="34" charset="0"/>
+                            </a:rPr>
+                            <m:t>𝑖</m:t>
+                          </m:r>
+                        </m:sub>
+                      </m:sSub>
+                    </m:oMath>
+                  </m:oMathPara>
+                </a14:m>
+                <a:endParaRPr kumimoji="1" lang="zh-CN" altLang="en-US" sz="1800" dirty="0">
+                  <a:solidFill>
+                    <a:schemeClr val="tx1"/>
+                  </a:solidFill>
+                  <a:latin typeface="Calibri" panose="020F0502020204030204" pitchFamily="34" charset="0"/>
+                  <a:cs typeface="Calibri" panose="020F0502020204030204" pitchFamily="34" charset="0"/>
+                </a:endParaRPr>
+              </a:p>
+            </p:txBody>
+          </p:sp>
+        </mc:Choice>
+        <mc:Fallback>
+          <p:sp>
+            <p:nvSpPr>
+              <p:cNvPr id="4" name="文本框 3">
+                <a:extLst>
+                  <a:ext uri="{FF2B5EF4-FFF2-40B4-BE49-F238E27FC236}">
+                    <a16:creationId xmlns:a16="http://schemas.microsoft.com/office/drawing/2014/main" id="{6473274F-A0DF-6C0B-1DF8-B7B923012086}"/>
+                  </a:ext>
+                </a:extLst>
+              </p:cNvPr>
+              <p:cNvSpPr txBox="1">
+                <a:spLocks noRot="1" noChangeAspect="1" noMove="1" noResize="1" noEditPoints="1" noAdjustHandles="1" noChangeArrowheads="1" noChangeShapeType="1" noTextEdit="1"/>
+              </p:cNvSpPr>
+              <p:nvPr/>
+            </p:nvSpPr>
+            <p:spPr>
+              <a:xfrm>
+                <a:off x="7450177" y="3672732"/>
+                <a:ext cx="708649" cy="369332"/>
+              </a:xfrm>
+              <a:prstGeom prst="rect">
+                <a:avLst/>
+              </a:prstGeom>
+              <a:blipFill>
+                <a:blip r:embed="rId19"/>
+                <a:stretch>
+                  <a:fillRect b="-6452"/>
+                </a:stretch>
+              </a:blipFill>
+            </p:spPr>
+            <p:txBody>
+              <a:bodyPr/>
+              <a:lstStyle/>
+              <a:p>
+                <a:r>
+                  <a:rPr lang="zh-CN" altLang="en-US">
+                    <a:noFill/>
+                  </a:rPr>
+                  <a:t> </a:t>
+                </a:r>
+              </a:p>
+            </p:txBody>
+          </p:sp>
+        </mc:Fallback>
+      </mc:AlternateContent>
     </p:spTree>
     <p:extLst>
       <p:ext uri="{BB962C8B-B14F-4D97-AF65-F5344CB8AC3E}">
